--- a/assets/figures-editable/c1-c2/c1-e32.pptx
+++ b/assets/figures-editable/c1-c2/c1-e32.pptx
@@ -7,7 +7,7 @@
   <p:sldIdLst>
     <p:sldId id="256" r:id="rId7"/>
   </p:sldIdLst>
-  <p:sldSz cx="11948160" cy="7924799" type="screen4x3"/>
+  <p:sldSz cx="12191695" cy="6858000" type="screen4x3"/>
   <p:notesSz cx="6858000" cy="9144000"/>
   <p:defaultTextStyle>
     <a:defPPr>
@@ -3098,14 +3098,14 @@
       <p:grpSpPr/>
       <p:sp>
         <p:nvSpPr>
-          <p:cNvPr id="2" name="text1" descr="sci-ppt:C1-E32-001"/>
+          <p:cNvPr id="2" name="C1-E32 text 0" descr="sci-ppt:o000"/>
           <p:cNvSpPr txBox="1"/>
           <p:nvPr/>
         </p:nvSpPr>
         <p:spPr>
           <a:xfrm>
-            <a:off x="316992" y="268224"/>
-            <a:ext cx="11277600" cy="359054"/>
+            <a:off x="274320" y="118872"/>
+            <a:ext cx="11612880" cy="340105"/>
           </a:xfrm>
           <a:prstGeom prst="rect">
             <a:avLst/>
@@ -3114,7 +3114,7 @@
           <a:effectLst/>
         </p:spPr>
         <p:txBody>
-          <a:bodyPr wrap="none" lIns="27432" rIns="27432" tIns="18288" bIns="18288" anchor="ctr">
+          <a:bodyPr wrap="none" lIns="18288" rIns="18288" tIns="18288" bIns="18288" anchor="t">
             <a:spAutoFit/>
           </a:bodyPr>
           <a:lstStyle/>
@@ -3125,35 +3125,635 @@
               </a:spcAft>
             </a:pPr>
             <a:r>
-              <a:rPr sz="1823" b="0" i="0">
+              <a:rPr sz="1900" b="1" i="0">
                 <a:solidFill>
                   <a:srgbClr val="8EDBD4"/>
                 </a:solidFill>
                 <a:latin typeface="Arial"/>
               </a:rPr>
-              <a:t>C1-E32 | Physical-variable diagram</a:t>
-            </a:r>
-          </a:p>
-        </p:txBody>
-      </p:sp>
-      <p:sp>
-        <p:nvSpPr>
-          <p:cNvPr id="3" name="rect2" descr="sci-ppt:C1-E32-002"/>
+              <a:t>C1-E32 · Original formulas quoted for defense 1</a:t>
+            </a:r>
+          </a:p>
+        </p:txBody>
+      </p:sp>
+      <p:sp>
+        <p:nvSpPr>
+          <p:cNvPr id="3" name="C1-E32 round_rect 1" descr="sci-ppt:o001"/>
           <p:cNvSpPr/>
           <p:nvPr/>
         </p:nvSpPr>
         <p:spPr>
           <a:xfrm>
-            <a:off x="731520" y="1950720"/>
-            <a:ext cx="2865120" cy="1219200"/>
-          </a:xfrm>
-          <a:prstGeom prst="rect">
+            <a:off x="457200" y="1280160"/>
+            <a:ext cx="2503170" cy="1554480"/>
+          </a:xfrm>
+          <a:prstGeom prst="roundRect">
             <a:avLst/>
           </a:prstGeom>
           <a:solidFill>
             <a:srgbClr val="213E4B"/>
           </a:solidFill>
-          <a:ln w="19050">
+          <a:ln w="20320">
+            <a:solidFill>
+              <a:srgbClr val="F2B880"/>
+            </a:solidFill>
+          </a:ln>
+          <a:effectLst/>
+        </p:spPr>
+        <p:txBody>
+          <a:bodyPr rtlCol="0" anchor="ctr"/>
+          <a:lstStyle/>
+          <a:p>
+            <a:pPr algn="ctr"/>
+          </a:p>
+        </p:txBody>
+      </p:sp>
+      <p:sp>
+        <p:nvSpPr>
+          <p:cNvPr id="4" name="C1-E32 text 2" descr="sci-ppt:o002"/>
+          <p:cNvSpPr txBox="1"/>
+          <p:nvPr/>
+        </p:nvSpPr>
+        <p:spPr>
+          <a:xfrm>
+            <a:off x="530352" y="1335024"/>
+            <a:ext cx="2356866" cy="254889"/>
+          </a:xfrm>
+          <a:prstGeom prst="rect">
+            <a:avLst/>
+          </a:prstGeom>
+          <a:noFill/>
+          <a:effectLst/>
+        </p:spPr>
+        <p:txBody>
+          <a:bodyPr wrap="none" lIns="18288" rIns="18288" tIns="18288" bIns="18288" anchor="t">
+            <a:spAutoFit/>
+          </a:bodyPr>
+          <a:lstStyle/>
+          <a:p>
+            <a:pPr algn="ctr">
+              <a:spcAft>
+                <a:spcPts val="0"/>
+              </a:spcAft>
+            </a:pPr>
+            <a:r>
+              <a:rPr sz="1350" b="1" i="0">
+                <a:solidFill>
+                  <a:srgbClr val="F2B880"/>
+                </a:solidFill>
+                <a:latin typeface="Arial"/>
+              </a:rPr>
+              <a:t>Source pressure</a:t>
+            </a:r>
+          </a:p>
+        </p:txBody>
+      </p:sp>
+      <p:sp>
+        <p:nvSpPr>
+          <p:cNvPr id="5" name="C1-E32 text 3" descr="sci-ppt:o003"/>
+          <p:cNvSpPr txBox="1"/>
+          <p:nvPr/>
+        </p:nvSpPr>
+        <p:spPr>
+          <a:xfrm>
+            <a:off x="530352" y="1608201"/>
+            <a:ext cx="2356866" cy="433070"/>
+          </a:xfrm>
+          <a:prstGeom prst="rect">
+            <a:avLst/>
+          </a:prstGeom>
+          <a:noFill/>
+          <a:effectLst/>
+        </p:spPr>
+        <p:txBody>
+          <a:bodyPr wrap="none" lIns="18288" rIns="18288" tIns="18288" bIns="18288" anchor="t">
+            <a:spAutoFit/>
+          </a:bodyPr>
+          <a:lstStyle/>
+          <a:p>
+            <a:pPr algn="ctr">
+              <a:spcAft>
+                <a:spcPts val="0"/>
+              </a:spcAft>
+            </a:pPr>
+            <a:r>
+              <a:rPr sz="1250" b="0" i="0">
+                <a:solidFill>
+                  <a:srgbClr val="E7F0F3"/>
+                </a:solidFill>
+                <a:latin typeface="Arial"/>
+              </a:rPr>
+              <a:t>p_b from the contents (E08),</a:t>
+            </a:r>
+          </a:p>
+          <a:p>
+            <a:pPr algn="ctr">
+              <a:spcAft>
+                <a:spcPts val="0"/>
+              </a:spcAft>
+            </a:pPr>
+            <a:r>
+              <a:rPr sz="1250" b="0" i="0">
+                <a:solidFill>
+                  <a:srgbClr val="E7F0F3"/>
+                </a:solidFill>
+                <a:latin typeface="Arial"/>
+              </a:rPr>
+              <a:t>not from R alone</a:t>
+            </a:r>
+          </a:p>
+        </p:txBody>
+      </p:sp>
+      <p:cxnSp>
+        <p:nvCxnSpPr>
+          <p:cNvPr id="6" name="C1-E32 arrow 4" descr="sci-ppt:o004"/>
+          <p:cNvCxnSpPr/>
+          <p:nvPr/>
+        </p:nvCxnSpPr>
+        <p:spPr>
+          <a:xfrm>
+            <a:off x="2987802" y="2057400"/>
+            <a:ext cx="356616" cy="0"/>
+          </a:xfrm>
+          <a:prstGeom prst="line">
+            <a:avLst/>
+          </a:prstGeom>
+          <a:ln w="27940">
+            <a:solidFill>
+              <a:srgbClr val="B4C7D2"/>
+            </a:solidFill>
+            <a:headEnd type="none" w="med" len="med"/>
+            <a:tailEnd type="triangle" w="med" len="med"/>
+          </a:ln>
+          <a:effectLst/>
+        </p:spPr>
+      </p:cxnSp>
+      <p:sp>
+        <p:nvSpPr>
+          <p:cNvPr id="7" name="C1-E32 round_rect 5" descr="sci-ppt:o005"/>
+          <p:cNvSpPr/>
+          <p:nvPr/>
+        </p:nvSpPr>
+        <p:spPr>
+          <a:xfrm>
+            <a:off x="3371850" y="1280160"/>
+            <a:ext cx="2503170" cy="1554480"/>
+          </a:xfrm>
+          <a:prstGeom prst="roundRect">
+            <a:avLst/>
+          </a:prstGeom>
+          <a:solidFill>
+            <a:srgbClr val="213E4B"/>
+          </a:solidFill>
+          <a:ln w="20320">
+            <a:solidFill>
+              <a:srgbClr val="8EDBD4"/>
+            </a:solidFill>
+          </a:ln>
+          <a:effectLst/>
+        </p:spPr>
+        <p:txBody>
+          <a:bodyPr rtlCol="0" anchor="ctr"/>
+          <a:lstStyle/>
+          <a:p>
+            <a:pPr algn="ctr"/>
+          </a:p>
+        </p:txBody>
+      </p:sp>
+      <p:sp>
+        <p:nvSpPr>
+          <p:cNvPr id="8" name="C1-E32 text 6" descr="sci-ppt:o006"/>
+          <p:cNvSpPr txBox="1"/>
+          <p:nvPr/>
+        </p:nvSpPr>
+        <p:spPr>
+          <a:xfrm>
+            <a:off x="3445002" y="1335024"/>
+            <a:ext cx="2356866" cy="254889"/>
+          </a:xfrm>
+          <a:prstGeom prst="rect">
+            <a:avLst/>
+          </a:prstGeom>
+          <a:noFill/>
+          <a:effectLst/>
+        </p:spPr>
+        <p:txBody>
+          <a:bodyPr wrap="none" lIns="18288" rIns="18288" tIns="18288" bIns="18288" anchor="t">
+            <a:spAutoFit/>
+          </a:bodyPr>
+          <a:lstStyle/>
+          <a:p>
+            <a:pPr algn="ctr">
+              <a:spcAft>
+                <a:spcPts val="0"/>
+              </a:spcAft>
+            </a:pPr>
+            <a:r>
+              <a:rPr sz="1350" b="1" i="0">
+                <a:solidFill>
+                  <a:srgbClr val="8EDBD4"/>
+                </a:solidFill>
+                <a:latin typeface="Arial"/>
+              </a:rPr>
+              <a:t>Radius motion</a:t>
+            </a:r>
+          </a:p>
+        </p:txBody>
+      </p:sp>
+      <p:sp>
+        <p:nvSpPr>
+          <p:cNvPr id="9" name="C1-E32 text 7" descr="sci-ppt:o007"/>
+          <p:cNvSpPr txBox="1"/>
+          <p:nvPr/>
+        </p:nvSpPr>
+        <p:spPr>
+          <a:xfrm>
+            <a:off x="3445002" y="1608201"/>
+            <a:ext cx="2356866" cy="433070"/>
+          </a:xfrm>
+          <a:prstGeom prst="rect">
+            <a:avLst/>
+          </a:prstGeom>
+          <a:noFill/>
+          <a:effectLst/>
+        </p:spPr>
+        <p:txBody>
+          <a:bodyPr wrap="none" lIns="18288" rIns="18288" tIns="18288" bIns="18288" anchor="t">
+            <a:spAutoFit/>
+          </a:bodyPr>
+          <a:lstStyle/>
+          <a:p>
+            <a:pPr algn="ctr">
+              <a:spcAft>
+                <a:spcPts val="0"/>
+              </a:spcAft>
+            </a:pPr>
+            <a:r>
+              <a:rPr sz="1250" b="0" i="0">
+                <a:solidFill>
+                  <a:srgbClr val="E7F0F3"/>
+                </a:solidFill>
+                <a:latin typeface="Arial"/>
+              </a:rPr>
+              <a:t>Rayleigh–Plesset: p_b − p∞ −</a:t>
+            </a:r>
+          </a:p>
+          <a:p>
+            <a:pPr algn="ctr">
+              <a:spcAft>
+                <a:spcPts val="0"/>
+              </a:spcAft>
+            </a:pPr>
+            <a:r>
+              <a:rPr sz="1250" b="0" i="0">
+                <a:solidFill>
+                  <a:srgbClr val="E7F0F3"/>
+                </a:solidFill>
+                <a:latin typeface="Arial"/>
+              </a:rPr>
+              <a:t>2σ/R − 4μṘ/R (E07)</a:t>
+            </a:r>
+          </a:p>
+        </p:txBody>
+      </p:sp>
+      <p:cxnSp>
+        <p:nvCxnSpPr>
+          <p:cNvPr id="10" name="C1-E32 arrow 8" descr="sci-ppt:o008"/>
+          <p:cNvCxnSpPr/>
+          <p:nvPr/>
+        </p:nvCxnSpPr>
+        <p:spPr>
+          <a:xfrm>
+            <a:off x="5902452" y="2057400"/>
+            <a:ext cx="356616" cy="0"/>
+          </a:xfrm>
+          <a:prstGeom prst="line">
+            <a:avLst/>
+          </a:prstGeom>
+          <a:ln w="27940">
+            <a:solidFill>
+              <a:srgbClr val="B4C7D2"/>
+            </a:solidFill>
+            <a:headEnd type="none" w="med" len="med"/>
+            <a:tailEnd type="triangle" w="med" len="med"/>
+          </a:ln>
+          <a:effectLst/>
+        </p:spPr>
+      </p:cxnSp>
+      <p:sp>
+        <p:nvSpPr>
+          <p:cNvPr id="11" name="C1-E32 round_rect 9" descr="sci-ppt:o009"/>
+          <p:cNvSpPr/>
+          <p:nvPr/>
+        </p:nvSpPr>
+        <p:spPr>
+          <a:xfrm>
+            <a:off x="6286500" y="1280160"/>
+            <a:ext cx="2503170" cy="1554480"/>
+          </a:xfrm>
+          <a:prstGeom prst="roundRect">
+            <a:avLst/>
+          </a:prstGeom>
+          <a:solidFill>
+            <a:srgbClr val="213E4B"/>
+          </a:solidFill>
+          <a:ln w="20320">
+            <a:solidFill>
+              <a:srgbClr val="7FC8F8"/>
+            </a:solidFill>
+          </a:ln>
+          <a:effectLst/>
+        </p:spPr>
+        <p:txBody>
+          <a:bodyPr rtlCol="0" anchor="ctr"/>
+          <a:lstStyle/>
+          <a:p>
+            <a:pPr algn="ctr"/>
+          </a:p>
+        </p:txBody>
+      </p:sp>
+      <p:sp>
+        <p:nvSpPr>
+          <p:cNvPr id="12" name="C1-E32 text 10" descr="sci-ppt:o010"/>
+          <p:cNvSpPr txBox="1"/>
+          <p:nvPr/>
+        </p:nvSpPr>
+        <p:spPr>
+          <a:xfrm>
+            <a:off x="6359652" y="1335024"/>
+            <a:ext cx="2356866" cy="254889"/>
+          </a:xfrm>
+          <a:prstGeom prst="rect">
+            <a:avLst/>
+          </a:prstGeom>
+          <a:noFill/>
+          <a:effectLst/>
+        </p:spPr>
+        <p:txBody>
+          <a:bodyPr wrap="none" lIns="18288" rIns="18288" tIns="18288" bIns="18288" anchor="t">
+            <a:spAutoFit/>
+          </a:bodyPr>
+          <a:lstStyle/>
+          <a:p>
+            <a:pPr algn="ctr">
+              <a:spcAft>
+                <a:spcPts val="0"/>
+              </a:spcAft>
+            </a:pPr>
+            <a:r>
+              <a:rPr sz="1350" b="1" i="0">
+                <a:solidFill>
+                  <a:srgbClr val="7FC8F8"/>
+                </a:solidFill>
+                <a:latin typeface="Arial"/>
+              </a:rPr>
+              <a:t>Liquid response</a:t>
+            </a:r>
+          </a:p>
+        </p:txBody>
+      </p:sp>
+      <p:sp>
+        <p:nvSpPr>
+          <p:cNvPr id="13" name="C1-E32 text 11" descr="sci-ppt:o011"/>
+          <p:cNvSpPr txBox="1"/>
+          <p:nvPr/>
+        </p:nvSpPr>
+        <p:spPr>
+          <a:xfrm>
+            <a:off x="6359652" y="1608201"/>
+            <a:ext cx="2356866" cy="626745"/>
+          </a:xfrm>
+          <a:prstGeom prst="rect">
+            <a:avLst/>
+          </a:prstGeom>
+          <a:noFill/>
+          <a:effectLst/>
+        </p:spPr>
+        <p:txBody>
+          <a:bodyPr wrap="none" lIns="18288" rIns="18288" tIns="18288" bIns="18288" anchor="t">
+            <a:spAutoFit/>
+          </a:bodyPr>
+          <a:lstStyle/>
+          <a:p>
+            <a:pPr algn="ctr">
+              <a:spcAft>
+                <a:spcPts val="0"/>
+              </a:spcAft>
+            </a:pPr>
+            <a:r>
+              <a:rPr sz="1250" b="0" i="0">
+                <a:solidFill>
+                  <a:srgbClr val="E7F0F3"/>
+                </a:solidFill>
+                <a:latin typeface="Arial"/>
+              </a:rPr>
+              <a:t>inertia stores the work;</a:t>
+            </a:r>
+          </a:p>
+          <a:p>
+            <a:pPr algn="ctr">
+              <a:spcAft>
+                <a:spcPts val="0"/>
+              </a:spcAft>
+            </a:pPr>
+            <a:r>
+              <a:rPr sz="1250" b="0" i="0">
+                <a:solidFill>
+                  <a:srgbClr val="E7F0F3"/>
+                </a:solidFill>
+                <a:latin typeface="Arial"/>
+              </a:rPr>
+              <a:t>impulse Π gives early speed</a:t>
+            </a:r>
+          </a:p>
+          <a:p>
+            <a:pPr algn="ctr">
+              <a:spcAft>
+                <a:spcPts val="0"/>
+              </a:spcAft>
+            </a:pPr>
+            <a:r>
+              <a:rPr sz="1250" b="0" i="0">
+                <a:solidFill>
+                  <a:srgbClr val="E7F0F3"/>
+                </a:solidFill>
+                <a:latin typeface="Arial"/>
+              </a:rPr>
+              <a:t>(E05, E21)</a:t>
+            </a:r>
+          </a:p>
+        </p:txBody>
+      </p:sp>
+      <p:cxnSp>
+        <p:nvCxnSpPr>
+          <p:cNvPr id="14" name="C1-E32 arrow 12" descr="sci-ppt:o012"/>
+          <p:cNvCxnSpPr/>
+          <p:nvPr/>
+        </p:nvCxnSpPr>
+        <p:spPr>
+          <a:xfrm>
+            <a:off x="8817102" y="2057400"/>
+            <a:ext cx="356616" cy="0"/>
+          </a:xfrm>
+          <a:prstGeom prst="line">
+            <a:avLst/>
+          </a:prstGeom>
+          <a:ln w="27940">
+            <a:solidFill>
+              <a:srgbClr val="B4C7D2"/>
+            </a:solidFill>
+            <a:headEnd type="none" w="med" len="med"/>
+            <a:tailEnd type="triangle" w="med" len="med"/>
+          </a:ln>
+          <a:effectLst/>
+        </p:spPr>
+      </p:cxnSp>
+      <p:sp>
+        <p:nvSpPr>
+          <p:cNvPr id="15" name="C1-E32 round_rect 13" descr="sci-ppt:o013"/>
+          <p:cNvSpPr/>
+          <p:nvPr/>
+        </p:nvSpPr>
+        <p:spPr>
+          <a:xfrm>
+            <a:off x="9201150" y="1280160"/>
+            <a:ext cx="2503170" cy="1554480"/>
+          </a:xfrm>
+          <a:prstGeom prst="roundRect">
+            <a:avLst/>
+          </a:prstGeom>
+          <a:solidFill>
+            <a:srgbClr val="213E4B"/>
+          </a:solidFill>
+          <a:ln w="20320">
+            <a:solidFill>
+              <a:srgbClr val="F28BA0"/>
+            </a:solidFill>
+          </a:ln>
+          <a:effectLst/>
+        </p:spPr>
+        <p:txBody>
+          <a:bodyPr rtlCol="0" anchor="ctr"/>
+          <a:lstStyle/>
+          <a:p>
+            <a:pPr algn="ctr"/>
+          </a:p>
+        </p:txBody>
+      </p:sp>
+      <p:sp>
+        <p:nvSpPr>
+          <p:cNvPr id="16" name="C1-E32 text 14" descr="sci-ppt:o014"/>
+          <p:cNvSpPr txBox="1"/>
+          <p:nvPr/>
+        </p:nvSpPr>
+        <p:spPr>
+          <a:xfrm>
+            <a:off x="9274302" y="1335024"/>
+            <a:ext cx="2356866" cy="254889"/>
+          </a:xfrm>
+          <a:prstGeom prst="rect">
+            <a:avLst/>
+          </a:prstGeom>
+          <a:noFill/>
+          <a:effectLst/>
+        </p:spPr>
+        <p:txBody>
+          <a:bodyPr wrap="none" lIns="18288" rIns="18288" tIns="18288" bIns="18288" anchor="t">
+            <a:spAutoFit/>
+          </a:bodyPr>
+          <a:lstStyle/>
+          <a:p>
+            <a:pPr algn="ctr">
+              <a:spcAft>
+                <a:spcPts val="0"/>
+              </a:spcAft>
+            </a:pPr>
+            <a:r>
+              <a:rPr sz="1350" b="1" i="0">
+                <a:solidFill>
+                  <a:srgbClr val="F28BA0"/>
+                </a:solidFill>
+                <a:latin typeface="Arial"/>
+              </a:rPr>
+              <a:t>Geometry</a:t>
+            </a:r>
+          </a:p>
+        </p:txBody>
+      </p:sp>
+      <p:sp>
+        <p:nvSpPr>
+          <p:cNvPr id="17" name="C1-E32 text 15" descr="sci-ppt:o015"/>
+          <p:cNvSpPr txBox="1"/>
+          <p:nvPr/>
+        </p:nvSpPr>
+        <p:spPr>
+          <a:xfrm>
+            <a:off x="9274302" y="1608201"/>
+            <a:ext cx="2356866" cy="433070"/>
+          </a:xfrm>
+          <a:prstGeom prst="rect">
+            <a:avLst/>
+          </a:prstGeom>
+          <a:noFill/>
+          <a:effectLst/>
+        </p:spPr>
+        <p:txBody>
+          <a:bodyPr wrap="none" lIns="18288" rIns="18288" tIns="18288" bIns="18288" anchor="t">
+            <a:spAutoFit/>
+          </a:bodyPr>
+          <a:lstStyle/>
+          <a:p>
+            <a:pPr algn="ctr">
+              <a:spcAft>
+                <a:spcPts val="0"/>
+              </a:spcAft>
+            </a:pPr>
+            <a:r>
+              <a:rPr sz="1250" b="0" i="0">
+                <a:solidFill>
+                  <a:srgbClr val="E7F0F3"/>
+                </a:solidFill>
+                <a:latin typeface="Arial"/>
+              </a:rPr>
+              <a:t>stand-off and walls decide</a:t>
+            </a:r>
+          </a:p>
+          <a:p>
+            <a:pPr algn="ctr">
+              <a:spcAft>
+                <a:spcPts val="0"/>
+              </a:spcAft>
+            </a:pPr>
+            <a:r>
+              <a:rPr sz="1250" b="0" i="0">
+                <a:solidFill>
+                  <a:srgbClr val="E7F0F3"/>
+                </a:solidFill>
+                <a:latin typeface="Arial"/>
+              </a:rPr>
+              <a:t>direction (E26–E29)</a:t>
+            </a:r>
+          </a:p>
+        </p:txBody>
+      </p:sp>
+      <p:sp>
+        <p:nvSpPr>
+          <p:cNvPr id="18" name="C1-E32 round_rect 16" descr="sci-ppt:o016"/>
+          <p:cNvSpPr/>
+          <p:nvPr/>
+        </p:nvSpPr>
+        <p:spPr>
+          <a:xfrm>
+            <a:off x="457200" y="3200400"/>
+            <a:ext cx="11247120" cy="1417320"/>
+          </a:xfrm>
+          <a:prstGeom prst="roundRect">
+            <a:avLst/>
+          </a:prstGeom>
+          <a:solidFill>
+            <a:srgbClr val="213E4B"/>
+          </a:solidFill>
+          <a:ln w="20320">
             <a:solidFill>
               <a:srgbClr val="B4C7D2"/>
             </a:solidFill>
@@ -3170,14 +3770,14 @@
       </p:sp>
       <p:sp>
         <p:nvSpPr>
-          <p:cNvPr id="4" name="text3" descr="sci-ppt:C1-E32-003"/>
+          <p:cNvPr id="19" name="C1-E32 text 17" descr="sci-ppt:o017"/>
           <p:cNvSpPr txBox="1"/>
           <p:nvPr/>
         </p:nvSpPr>
         <p:spPr>
           <a:xfrm>
-            <a:off x="853440" y="2072640"/>
-            <a:ext cx="2682240" cy="340156"/>
+            <a:off x="594360" y="3273552"/>
+            <a:ext cx="10972800" cy="254889"/>
           </a:xfrm>
           <a:prstGeom prst="rect">
             <a:avLst/>
@@ -3186,7 +3786,7 @@
           <a:effectLst/>
         </p:spPr>
         <p:txBody>
-          <a:bodyPr wrap="none" lIns="27432" rIns="27432" tIns="18288" bIns="18288" anchor="ctr">
+          <a:bodyPr wrap="none" lIns="18288" rIns="18288" tIns="18288" bIns="18288" anchor="t">
             <a:spAutoFit/>
           </a:bodyPr>
           <a:lstStyle/>
@@ -3197,59 +3797,83 @@
               </a:spcAft>
             </a:pPr>
             <a:r>
-              <a:rPr sz="1728" b="0" i="0">
+              <a:rPr sz="1350" b="1" i="0">
+                <a:solidFill>
+                  <a:srgbClr val="8EDBD4"/>
+                </a:solidFill>
+                <a:latin typeface="Arial"/>
+              </a:rPr>
+              <a:t>Reference formulas of the defence answer</a:t>
+            </a:r>
+          </a:p>
+        </p:txBody>
+      </p:sp>
+      <p:sp>
+        <p:nvSpPr>
+          <p:cNvPr id="20" name="C1-E32 text 18" descr="sci-ppt:o018"/>
+          <p:cNvSpPr txBox="1"/>
+          <p:nvPr/>
+        </p:nvSpPr>
+        <p:spPr>
+          <a:xfrm>
+            <a:off x="594360" y="3657600"/>
+            <a:ext cx="10972800" cy="479551"/>
+          </a:xfrm>
+          <a:prstGeom prst="rect">
+            <a:avLst/>
+          </a:prstGeom>
+          <a:noFill/>
+          <a:effectLst/>
+        </p:spPr>
+        <p:txBody>
+          <a:bodyPr wrap="none" lIns="18288" rIns="18288" tIns="18288" bIns="18288" anchor="t">
+            <a:spAutoFit/>
+          </a:bodyPr>
+          <a:lstStyle/>
+          <a:p>
+            <a:pPr algn="l">
+              <a:spcAft>
+                <a:spcPts val="0"/>
+              </a:spcAft>
+            </a:pPr>
+            <a:r>
+              <a:rPr sz="1400" b="1" i="0">
                 <a:solidFill>
                   <a:srgbClr val="E7F0F3"/>
                 </a:solidFill>
                 <a:latin typeface="Arial"/>
               </a:rPr>
-              <a:t>Finite PFC / heat input</a:t>
-            </a:r>
-          </a:p>
-        </p:txBody>
-      </p:sp>
-      <p:sp>
-        <p:nvSpPr>
-          <p:cNvPr id="5" name="rect4" descr="sci-ppt:C1-E32-004"/>
-          <p:cNvSpPr/>
-          <p:nvPr/>
-        </p:nvSpPr>
-        <p:spPr>
-          <a:xfrm>
-            <a:off x="4511040" y="1950720"/>
-            <a:ext cx="2865120" cy="1219200"/>
-          </a:xfrm>
-          <a:prstGeom prst="rect">
-            <a:avLst/>
-          </a:prstGeom>
-          <a:solidFill>
-            <a:srgbClr val="213E4B"/>
-          </a:solidFill>
-          <a:ln w="19050">
-            <a:solidFill>
-              <a:srgbClr val="B4C7D2"/>
-            </a:solidFill>
-          </a:ln>
-          <a:effectLst/>
-        </p:spPr>
-        <p:txBody>
-          <a:bodyPr rtlCol="0" anchor="ctr"/>
-          <a:lstStyle/>
-          <a:p>
-            <a:pPr algn="ctr"/>
-          </a:p>
-        </p:txBody>
-      </p:sp>
-      <p:sp>
-        <p:nvSpPr>
-          <p:cNvPr id="6" name="text5" descr="sci-ppt:C1-E32-005"/>
+              <a:t>ρ(RR̈ + 3Ṙ²/2) = p_b − p∞ − 2σ/R − 4μṘ/R</a:t>
+            </a:r>
+          </a:p>
+          <a:p>
+            <a:pPr algn="l">
+              <a:spcAft>
+                <a:spcPts val="0"/>
+              </a:spcAft>
+            </a:pPr>
+            <a:r>
+              <a:rPr sz="1400" b="1" i="0">
+                <a:solidFill>
+                  <a:srgbClr val="E7F0F3"/>
+                </a:solidFill>
+                <a:latin typeface="Arial"/>
+              </a:rPr>
+              <a:t>p_b = pᵥ,PFC + pᵥ,w + p_g</a:t>
+            </a:r>
+          </a:p>
+        </p:txBody>
+      </p:sp>
+      <p:sp>
+        <p:nvSpPr>
+          <p:cNvPr id="21" name="C1-E32 text 19" descr="sci-ppt:o019"/>
           <p:cNvSpPr txBox="1"/>
           <p:nvPr/>
         </p:nvSpPr>
         <p:spPr>
           <a:xfrm>
-            <a:off x="4632960" y="2072640"/>
-            <a:ext cx="2682240" cy="340156"/>
+            <a:off x="457200" y="4846320"/>
+            <a:ext cx="11247120" cy="464057"/>
           </a:xfrm>
           <a:prstGeom prst="rect">
             <a:avLst/>
@@ -3258,7 +3882,7 @@
           <a:effectLst/>
         </p:spPr>
         <p:txBody>
-          <a:bodyPr wrap="none" lIns="27432" rIns="27432" tIns="18288" bIns="18288" anchor="ctr">
+          <a:bodyPr wrap="none" lIns="18288" rIns="18288" tIns="18288" bIns="18288" anchor="t">
             <a:spAutoFit/>
           </a:bodyPr>
           <a:lstStyle/>
@@ -3269,59 +3893,43 @@
               </a:spcAft>
             </a:pPr>
             <a:r>
-              <a:rPr sz="1728" b="0" i="0">
+              <a:rPr sz="1350" b="0" i="0">
                 <a:solidFill>
-                  <a:srgbClr val="E7F0F3"/>
+                  <a:srgbClr val="F2B880"/>
                 </a:solidFill>
                 <a:latin typeface="Arial"/>
               </a:rPr>
-              <a:t>Bubble pressure p_b</a:t>
-            </a:r>
-          </a:p>
-        </p:txBody>
-      </p:sp>
-      <p:sp>
-        <p:nvSpPr>
-          <p:cNvPr id="7" name="rect6" descr="sci-ppt:C1-E32-006"/>
-          <p:cNvSpPr/>
-          <p:nvPr/>
-        </p:nvSpPr>
-        <p:spPr>
-          <a:xfrm>
-            <a:off x="8290560" y="1950720"/>
-            <a:ext cx="2865120" cy="1219200"/>
-          </a:xfrm>
-          <a:prstGeom prst="rect">
-            <a:avLst/>
-          </a:prstGeom>
-          <a:solidFill>
-            <a:srgbClr val="213E4B"/>
-          </a:solidFill>
-          <a:ln w="19050">
-            <a:solidFill>
-              <a:srgbClr val="B4C7D2"/>
-            </a:solidFill>
-          </a:ln>
-          <a:effectLst/>
-        </p:spPr>
-        <p:txBody>
-          <a:bodyPr rtlCol="0" anchor="ctr"/>
-          <a:lstStyle/>
-          <a:p>
-            <a:pPr algn="ctr"/>
-          </a:p>
-        </p:txBody>
-      </p:sp>
-      <p:sp>
-        <p:nvSpPr>
-          <p:cNvPr id="8" name="text7" descr="sci-ppt:C1-E32-007"/>
+              <a:t>The source pressure moves carrier liquid. Whether that motion becomes a useful jet is decided by geometry, not by the</a:t>
+            </a:r>
+          </a:p>
+          <a:p>
+            <a:pPr algn="l">
+              <a:spcAft>
+                <a:spcPts val="0"/>
+              </a:spcAft>
+            </a:pPr>
+            <a:r>
+              <a:rPr sz="1350" b="0" i="0">
+                <a:solidFill>
+                  <a:srgbClr val="F2B880"/>
+                </a:solidFill>
+                <a:latin typeface="Arial"/>
+              </a:rPr>
+              <a:t>pressure alone.</a:t>
+            </a:r>
+          </a:p>
+        </p:txBody>
+      </p:sp>
+      <p:sp>
+        <p:nvSpPr>
+          <p:cNvPr id="22" name="C1-E32 text 20" descr="sci-ppt:o020"/>
           <p:cNvSpPr txBox="1"/>
           <p:nvPr/>
         </p:nvSpPr>
         <p:spPr>
           <a:xfrm>
-            <a:off x="8412480" y="2072640"/>
-            <a:ext cx="2682240" cy="340156"/>
+            <a:off x="457200" y="5394960"/>
+            <a:ext cx="11247120" cy="239395"/>
           </a:xfrm>
           <a:prstGeom prst="rect">
             <a:avLst/>
@@ -3330,7 +3938,7 @@
           <a:effectLst/>
         </p:spPr>
         <p:txBody>
-          <a:bodyPr wrap="none" lIns="27432" rIns="27432" tIns="18288" bIns="18288" anchor="ctr">
+          <a:bodyPr wrap="none" lIns="18288" rIns="18288" tIns="18288" bIns="18288" anchor="t">
             <a:spAutoFit/>
           </a:bodyPr>
           <a:lstStyle/>
@@ -3341,75 +3949,27 @@
               </a:spcAft>
             </a:pPr>
             <a:r>
-              <a:rPr sz="1728" b="0" i="0">
+              <a:rPr sz="1250" b="0" i="0">
                 <a:solidFill>
-                  <a:srgbClr val="E7F0F3"/>
+                  <a:srgbClr val="B4C7D2"/>
                 </a:solidFill>
                 <a:latin typeface="Arial"/>
               </a:rPr>
-              <a:t>Carrier displacement</a:t>
-            </a:r>
-          </a:p>
-        </p:txBody>
-      </p:sp>
-      <p:cxnSp>
-        <p:nvCxnSpPr>
-          <p:cNvPr id="9" name="arrow8" descr="sci-ppt:C1-E32-008"/>
-          <p:cNvCxnSpPr/>
-          <p:nvPr/>
-        </p:nvCxnSpPr>
-        <p:spPr>
-          <a:xfrm>
-            <a:off x="3657600" y="2560320"/>
-            <a:ext cx="731520" cy="0"/>
-          </a:xfrm>
-          <a:prstGeom prst="line">
-            <a:avLst/>
-          </a:prstGeom>
-          <a:ln w="25400">
-            <a:solidFill>
-              <a:srgbClr val="8EDBD4"/>
-            </a:solidFill>
-            <a:headEnd type="none" w="med" len="med"/>
-            <a:tailEnd type="triangle" w="med" len="med"/>
-          </a:ln>
-          <a:effectLst/>
-        </p:spPr>
-      </p:cxnSp>
-      <p:cxnSp>
-        <p:nvCxnSpPr>
-          <p:cNvPr id="10" name="arrow9" descr="sci-ppt:C1-E32-009"/>
-          <p:cNvCxnSpPr/>
-          <p:nvPr/>
-        </p:nvCxnSpPr>
-        <p:spPr>
-          <a:xfrm>
-            <a:off x="7437120" y="2560320"/>
-            <a:ext cx="731520" cy="0"/>
-          </a:xfrm>
-          <a:prstGeom prst="line">
-            <a:avLst/>
-          </a:prstGeom>
-          <a:ln w="25400">
-            <a:solidFill>
-              <a:srgbClr val="8EDBD4"/>
-            </a:solidFill>
-            <a:headEnd type="none" w="med" len="med"/>
-            <a:tailEnd type="triangle" w="med" len="med"/>
-          </a:ln>
-          <a:effectLst/>
-        </p:spPr>
-      </p:cxnSp>
-      <p:sp>
-        <p:nvSpPr>
-          <p:cNvPr id="11" name="text10" descr="sci-ppt:C1-E32-010"/>
+              <a:t>Every term of the radius equation is a pressure (Pa); every term of the composition is a partial pressure.</a:t>
+            </a:r>
+          </a:p>
+        </p:txBody>
+      </p:sp>
+      <p:sp>
+        <p:nvSpPr>
+          <p:cNvPr id="23" name="C1-E32 text 21" descr="sci-ppt:o021"/>
           <p:cNvSpPr txBox="1"/>
           <p:nvPr/>
         </p:nvSpPr>
         <p:spPr>
           <a:xfrm>
-            <a:off x="1584960" y="3901440"/>
-            <a:ext cx="9509760" cy="377952"/>
+            <a:off x="320040" y="6510528"/>
+            <a:ext cx="11521440" cy="200660"/>
           </a:xfrm>
           <a:prstGeom prst="rect">
             <a:avLst/>
@@ -3418,7 +3978,7 @@
           <a:effectLst/>
         </p:spPr>
         <p:txBody>
-          <a:bodyPr wrap="none" lIns="27432" rIns="27432" tIns="18288" bIns="18288" anchor="ctr">
+          <a:bodyPr wrap="none" lIns="18288" rIns="18288" tIns="18288" bIns="18288" anchor="t">
             <a:spAutoFit/>
           </a:bodyPr>
           <a:lstStyle/>
@@ -3429,533 +3989,13 @@
               </a:spcAft>
             </a:pPr>
             <a:r>
-              <a:rPr sz="1920" b="0" i="0">
-                <a:solidFill>
-                  <a:srgbClr val="E7F0F3"/>
-                </a:solidFill>
-                <a:latin typeface="Arial"/>
-              </a:rPr>
-              <a:t>Geometry selects direction; scalar radius does not.</a:t>
-            </a:r>
-          </a:p>
-        </p:txBody>
-      </p:sp>
-      <p:sp>
-        <p:nvSpPr>
-          <p:cNvPr id="12" name="text11" descr="sci-ppt:C1-E32-011"/>
-          <p:cNvSpPr txBox="1"/>
-          <p:nvPr/>
-        </p:nvSpPr>
-        <p:spPr>
-          <a:xfrm>
-            <a:off x="365760" y="4974336"/>
-            <a:ext cx="5547360" cy="321259"/>
-          </a:xfrm>
-          <a:prstGeom prst="rect">
-            <a:avLst/>
-          </a:prstGeom>
-          <a:noFill/>
-          <a:effectLst/>
-        </p:spPr>
-        <p:txBody>
-          <a:bodyPr wrap="none" lIns="27432" rIns="27432" tIns="18288" bIns="18288" anchor="ctr">
-            <a:spAutoFit/>
-          </a:bodyPr>
-          <a:lstStyle/>
-          <a:p>
-            <a:pPr algn="l">
-              <a:spcAft>
-                <a:spcPts val="0"/>
-              </a:spcAft>
-            </a:pPr>
-            <a:r>
-              <a:rPr sz="1632" b="0" i="0">
-                <a:solidFill>
-                  <a:srgbClr val="E7F0F3"/>
-                </a:solidFill>
-                <a:latin typeface="Arial"/>
-              </a:rPr>
-              <a:t>PFC liquid → vapor</a:t>
-            </a:r>
-          </a:p>
-        </p:txBody>
-      </p:sp>
-      <p:sp>
-        <p:nvSpPr>
-          <p:cNvPr id="13" name="text12" descr="sci-ppt:C1-E32-012"/>
-          <p:cNvSpPr txBox="1"/>
-          <p:nvPr/>
-        </p:nvSpPr>
-        <p:spPr>
-          <a:xfrm>
-            <a:off x="365760" y="5266944"/>
-            <a:ext cx="5547360" cy="321259"/>
-          </a:xfrm>
-          <a:prstGeom prst="rect">
-            <a:avLst/>
-          </a:prstGeom>
-          <a:noFill/>
-          <a:effectLst/>
-        </p:spPr>
-        <p:txBody>
-          <a:bodyPr wrap="none" lIns="27432" rIns="27432" tIns="18288" bIns="18288" anchor="ctr">
-            <a:spAutoFit/>
-          </a:bodyPr>
-          <a:lstStyle/>
-          <a:p>
-            <a:pPr algn="l">
-              <a:spcAft>
-                <a:spcPts val="0"/>
-              </a:spcAft>
-            </a:pPr>
-            <a:r>
-              <a:rPr sz="1632" b="0" i="0">
-                <a:solidFill>
-                  <a:srgbClr val="E7F0F3"/>
-                </a:solidFill>
-                <a:latin typeface="Arial"/>
-              </a:rPr>
-              <a:t>pv,w</a:t>
-            </a:r>
-          </a:p>
-        </p:txBody>
-      </p:sp>
-      <p:sp>
-        <p:nvSpPr>
-          <p:cNvPr id="14" name="text13" descr="sci-ppt:C1-E32-013"/>
-          <p:cNvSpPr txBox="1"/>
-          <p:nvPr/>
-        </p:nvSpPr>
-        <p:spPr>
-          <a:xfrm>
-            <a:off x="365760" y="5559552"/>
-            <a:ext cx="5547360" cy="321259"/>
-          </a:xfrm>
-          <a:prstGeom prst="rect">
-            <a:avLst/>
-          </a:prstGeom>
-          <a:noFill/>
-          <a:effectLst/>
-        </p:spPr>
-        <p:txBody>
-          <a:bodyPr wrap="none" lIns="27432" rIns="27432" tIns="18288" bIns="18288" anchor="ctr">
-            <a:spAutoFit/>
-          </a:bodyPr>
-          <a:lstStyle/>
-          <a:p>
-            <a:pPr algn="l">
-              <a:spcAft>
-                <a:spcPts val="0"/>
-              </a:spcAft>
-            </a:pPr>
-            <a:r>
-              <a:rPr sz="1632" b="0" i="0">
-                <a:solidFill>
-                  <a:srgbClr val="E7F0F3"/>
-                </a:solidFill>
-                <a:latin typeface="Arial"/>
-              </a:rPr>
-              <a:t>pb</a:t>
-            </a:r>
-          </a:p>
-        </p:txBody>
-      </p:sp>
-      <p:sp>
-        <p:nvSpPr>
-          <p:cNvPr id="15" name="text14" descr="sci-ppt:C1-E32-014"/>
-          <p:cNvSpPr txBox="1"/>
-          <p:nvPr/>
-        </p:nvSpPr>
-        <p:spPr>
-          <a:xfrm>
-            <a:off x="365760" y="5852160"/>
-            <a:ext cx="5547360" cy="321259"/>
-          </a:xfrm>
-          <a:prstGeom prst="rect">
-            <a:avLst/>
-          </a:prstGeom>
-          <a:noFill/>
-          <a:effectLst/>
-        </p:spPr>
-        <p:txBody>
-          <a:bodyPr wrap="none" lIns="27432" rIns="27432" tIns="18288" bIns="18288" anchor="ctr">
-            <a:spAutoFit/>
-          </a:bodyPr>
-          <a:lstStyle/>
-          <a:p>
-            <a:pPr algn="l">
-              <a:spcAft>
-                <a:spcPts val="0"/>
-              </a:spcAft>
-            </a:pPr>
-            <a:r>
-              <a:rPr sz="1632" b="0" i="0">
-                <a:solidFill>
-                  <a:srgbClr val="E7F0F3"/>
-                </a:solidFill>
-                <a:latin typeface="Arial"/>
-              </a:rPr>
-              <a:t>ρ carrier</a:t>
-            </a:r>
-          </a:p>
-        </p:txBody>
-      </p:sp>
-      <p:sp>
-        <p:nvSpPr>
-          <p:cNvPr id="16" name="text15" descr="sci-ppt:C1-E32-015"/>
-          <p:cNvSpPr txBox="1"/>
-          <p:nvPr/>
-        </p:nvSpPr>
-        <p:spPr>
-          <a:xfrm>
-            <a:off x="365760" y="6144768"/>
-            <a:ext cx="5547360" cy="321259"/>
-          </a:xfrm>
-          <a:prstGeom prst="rect">
-            <a:avLst/>
-          </a:prstGeom>
-          <a:noFill/>
-          <a:effectLst/>
-        </p:spPr>
-        <p:txBody>
-          <a:bodyPr wrap="none" lIns="27432" rIns="27432" tIns="18288" bIns="18288" anchor="ctr">
-            <a:spAutoFit/>
-          </a:bodyPr>
-          <a:lstStyle/>
-          <a:p>
-            <a:pPr algn="l">
-              <a:spcAft>
-                <a:spcPts val="0"/>
-              </a:spcAft>
-            </a:pPr>
-            <a:r>
-              <a:rPr sz="1632" b="0" i="0">
-                <a:solidFill>
-                  <a:srgbClr val="E7F0F3"/>
-                </a:solidFill>
-                <a:latin typeface="Arial"/>
-              </a:rPr>
-              <a:t>Ṙ</a:t>
-            </a:r>
-          </a:p>
-        </p:txBody>
-      </p:sp>
-      <p:sp>
-        <p:nvSpPr>
-          <p:cNvPr id="17" name="text16" descr="sci-ppt:C1-E32-016"/>
-          <p:cNvSpPr txBox="1"/>
-          <p:nvPr/>
-        </p:nvSpPr>
-        <p:spPr>
-          <a:xfrm>
-            <a:off x="365760" y="6437376"/>
-            <a:ext cx="5547360" cy="321259"/>
-          </a:xfrm>
-          <a:prstGeom prst="rect">
-            <a:avLst/>
-          </a:prstGeom>
-          <a:noFill/>
-          <a:effectLst/>
-        </p:spPr>
-        <p:txBody>
-          <a:bodyPr wrap="none" lIns="27432" rIns="27432" tIns="18288" bIns="18288" anchor="ctr">
-            <a:spAutoFit/>
-          </a:bodyPr>
-          <a:lstStyle/>
-          <a:p>
-            <a:pPr algn="l">
-              <a:spcAft>
-                <a:spcPts val="0"/>
-              </a:spcAft>
-            </a:pPr>
-            <a:r>
-              <a:rPr sz="1632" b="0" i="0">
-                <a:solidFill>
-                  <a:srgbClr val="E7F0F3"/>
-                </a:solidFill>
-                <a:latin typeface="Arial"/>
-              </a:rPr>
-              <a:t>σ</a:t>
-            </a:r>
-          </a:p>
-        </p:txBody>
-      </p:sp>
-      <p:sp>
-        <p:nvSpPr>
-          <p:cNvPr id="18" name="text17" descr="sci-ppt:C1-E32-017"/>
-          <p:cNvSpPr txBox="1"/>
-          <p:nvPr/>
-        </p:nvSpPr>
-        <p:spPr>
-          <a:xfrm>
-            <a:off x="6156960" y="4974336"/>
-            <a:ext cx="5547360" cy="321259"/>
-          </a:xfrm>
-          <a:prstGeom prst="rect">
-            <a:avLst/>
-          </a:prstGeom>
-          <a:noFill/>
-          <a:effectLst/>
-        </p:spPr>
-        <p:txBody>
-          <a:bodyPr wrap="none" lIns="27432" rIns="27432" tIns="18288" bIns="18288" anchor="ctr">
-            <a:spAutoFit/>
-          </a:bodyPr>
-          <a:lstStyle/>
-          <a:p>
-            <a:pPr algn="l">
-              <a:spcAft>
-                <a:spcPts val="0"/>
-              </a:spcAft>
-            </a:pPr>
-            <a:r>
-              <a:rPr sz="1632" b="0" i="0">
-                <a:solidFill>
-                  <a:srgbClr val="E7F0F3"/>
-                </a:solidFill>
-                <a:latin typeface="Arial"/>
-              </a:rPr>
-              <a:t>pv,PFC</a:t>
-            </a:r>
-          </a:p>
-        </p:txBody>
-      </p:sp>
-      <p:sp>
-        <p:nvSpPr>
-          <p:cNvPr id="19" name="text18" descr="sci-ppt:C1-E32-018"/>
-          <p:cNvSpPr txBox="1"/>
-          <p:nvPr/>
-        </p:nvSpPr>
-        <p:spPr>
-          <a:xfrm>
-            <a:off x="6156960" y="5266944"/>
-            <a:ext cx="5547360" cy="321259"/>
-          </a:xfrm>
-          <a:prstGeom prst="rect">
-            <a:avLst/>
-          </a:prstGeom>
-          <a:noFill/>
-          <a:effectLst/>
-        </p:spPr>
-        <p:txBody>
-          <a:bodyPr wrap="none" lIns="27432" rIns="27432" tIns="18288" bIns="18288" anchor="ctr">
-            <a:spAutoFit/>
-          </a:bodyPr>
-          <a:lstStyle/>
-          <a:p>
-            <a:pPr algn="l">
-              <a:spcAft>
-                <a:spcPts val="0"/>
-              </a:spcAft>
-            </a:pPr>
-            <a:r>
-              <a:rPr sz="1632" b="0" i="0">
-                <a:solidFill>
-                  <a:srgbClr val="E7F0F3"/>
-                </a:solidFill>
-                <a:latin typeface="Arial"/>
-              </a:rPr>
-              <a:t>pg</a:t>
-            </a:r>
-          </a:p>
-        </p:txBody>
-      </p:sp>
-      <p:sp>
-        <p:nvSpPr>
-          <p:cNvPr id="20" name="text19" descr="sci-ppt:C1-E32-019"/>
-          <p:cNvSpPr txBox="1"/>
-          <p:nvPr/>
-        </p:nvSpPr>
-        <p:spPr>
-          <a:xfrm>
-            <a:off x="6156960" y="5559552"/>
-            <a:ext cx="5547360" cy="321259"/>
-          </a:xfrm>
-          <a:prstGeom prst="rect">
-            <a:avLst/>
-          </a:prstGeom>
-          <a:noFill/>
-          <a:effectLst/>
-        </p:spPr>
-        <p:txBody>
-          <a:bodyPr wrap="none" lIns="27432" rIns="27432" tIns="18288" bIns="18288" anchor="ctr">
-            <a:spAutoFit/>
-          </a:bodyPr>
-          <a:lstStyle/>
-          <a:p>
-            <a:pPr algn="l">
-              <a:spcAft>
-                <a:spcPts val="0"/>
-              </a:spcAft>
-            </a:pPr>
-            <a:r>
-              <a:rPr sz="1632" b="0" i="0">
-                <a:solidFill>
-                  <a:srgbClr val="E7F0F3"/>
-                </a:solidFill>
-                <a:latin typeface="Arial"/>
-              </a:rPr>
-              <a:t>p∞</a:t>
-            </a:r>
-          </a:p>
-        </p:txBody>
-      </p:sp>
-      <p:sp>
-        <p:nvSpPr>
-          <p:cNvPr id="21" name="text20" descr="sci-ppt:C1-E32-020"/>
-          <p:cNvSpPr txBox="1"/>
-          <p:nvPr/>
-        </p:nvSpPr>
-        <p:spPr>
-          <a:xfrm>
-            <a:off x="6156960" y="5852160"/>
-            <a:ext cx="5547360" cy="321259"/>
-          </a:xfrm>
-          <a:prstGeom prst="rect">
-            <a:avLst/>
-          </a:prstGeom>
-          <a:noFill/>
-          <a:effectLst/>
-        </p:spPr>
-        <p:txBody>
-          <a:bodyPr wrap="none" lIns="27432" rIns="27432" tIns="18288" bIns="18288" anchor="ctr">
-            <a:spAutoFit/>
-          </a:bodyPr>
-          <a:lstStyle/>
-          <a:p>
-            <a:pPr algn="l">
-              <a:spcAft>
-                <a:spcPts val="0"/>
-              </a:spcAft>
-            </a:pPr>
-            <a:r>
-              <a:rPr sz="1632" b="0" i="0">
-                <a:solidFill>
-                  <a:srgbClr val="E7F0F3"/>
-                </a:solidFill>
-                <a:latin typeface="Arial"/>
-              </a:rPr>
-              <a:t>R</a:t>
-            </a:r>
-          </a:p>
-        </p:txBody>
-      </p:sp>
-      <p:sp>
-        <p:nvSpPr>
-          <p:cNvPr id="22" name="text21" descr="sci-ppt:C1-E32-021"/>
-          <p:cNvSpPr txBox="1"/>
-          <p:nvPr/>
-        </p:nvSpPr>
-        <p:spPr>
-          <a:xfrm>
-            <a:off x="6156960" y="6144768"/>
-            <a:ext cx="5547360" cy="321259"/>
-          </a:xfrm>
-          <a:prstGeom prst="rect">
-            <a:avLst/>
-          </a:prstGeom>
-          <a:noFill/>
-          <a:effectLst/>
-        </p:spPr>
-        <p:txBody>
-          <a:bodyPr wrap="none" lIns="27432" rIns="27432" tIns="18288" bIns="18288" anchor="ctr">
-            <a:spAutoFit/>
-          </a:bodyPr>
-          <a:lstStyle/>
-          <a:p>
-            <a:pPr algn="l">
-              <a:spcAft>
-                <a:spcPts val="0"/>
-              </a:spcAft>
-            </a:pPr>
-            <a:r>
-              <a:rPr sz="1632" b="0" i="0">
-                <a:solidFill>
-                  <a:srgbClr val="E7F0F3"/>
-                </a:solidFill>
-                <a:latin typeface="Arial"/>
-              </a:rPr>
-              <a:t>R̈</a:t>
-            </a:r>
-          </a:p>
-        </p:txBody>
-      </p:sp>
-      <p:sp>
-        <p:nvSpPr>
-          <p:cNvPr id="23" name="text22" descr="sci-ppt:C1-E32-022"/>
-          <p:cNvSpPr txBox="1"/>
-          <p:nvPr/>
-        </p:nvSpPr>
-        <p:spPr>
-          <a:xfrm>
-            <a:off x="6156960" y="6437376"/>
-            <a:ext cx="5547360" cy="321259"/>
-          </a:xfrm>
-          <a:prstGeom prst="rect">
-            <a:avLst/>
-          </a:prstGeom>
-          <a:noFill/>
-          <a:effectLst/>
-        </p:spPr>
-        <p:txBody>
-          <a:bodyPr wrap="none" lIns="27432" rIns="27432" tIns="18288" bIns="18288" anchor="ctr">
-            <a:spAutoFit/>
-          </a:bodyPr>
-          <a:lstStyle/>
-          <a:p>
-            <a:pPr algn="l">
-              <a:spcAft>
-                <a:spcPts val="0"/>
-              </a:spcAft>
-            </a:pPr>
-            <a:r>
-              <a:rPr sz="1632" b="0" i="0">
-                <a:solidFill>
-                  <a:srgbClr val="E7F0F3"/>
-                </a:solidFill>
-                <a:latin typeface="Arial"/>
-              </a:rPr>
-              <a:t>μ</a:t>
-            </a:r>
-          </a:p>
-        </p:txBody>
-      </p:sp>
-      <p:sp>
-        <p:nvSpPr>
-          <p:cNvPr id="24" name="text23" descr="sci-ppt:C1-E32-023"/>
-          <p:cNvSpPr txBox="1"/>
-          <p:nvPr/>
-        </p:nvSpPr>
-        <p:spPr>
-          <a:xfrm>
-            <a:off x="365760" y="6925056"/>
-            <a:ext cx="11277600" cy="302361"/>
-          </a:xfrm>
-          <a:prstGeom prst="rect">
-            <a:avLst/>
-          </a:prstGeom>
-          <a:noFill/>
-          <a:effectLst/>
-        </p:spPr>
-        <p:txBody>
-          <a:bodyPr wrap="none" lIns="27432" rIns="27432" tIns="18288" bIns="18288" anchor="ctr">
-            <a:spAutoFit/>
-          </a:bodyPr>
-          <a:lstStyle/>
-          <a:p>
-            <a:pPr algn="l">
-              <a:spcAft>
-                <a:spcPts val="0"/>
-              </a:spcAft>
-            </a:pPr>
-            <a:r>
-              <a:rPr sz="1536" b="0" i="0">
+              <a:rPr sz="1000" b="0" i="0">
                 <a:solidFill>
                   <a:srgbClr val="B4C7D2"/>
                 </a:solidFill>
                 <a:latin typeface="Arial"/>
               </a:rPr>
-              <a:t>The pressure history must connect to a specific liquid path</a:t>
+              <a:t>Summary of Eqs. C1-E07 and C1-E08.</a:t>
             </a:r>
           </a:p>
         </p:txBody>

--- a/assets/figures-editable/c1-c2/c1-e32.pptx
+++ b/assets/figures-editable/c1-c2/c1-e32.pptx
@@ -3131,53 +3131,109 @@
                 </a:solidFill>
                 <a:latin typeface="Arial"/>
               </a:rPr>
-              <a:t>C1-E32 · Original formulas quoted for defense 1</a:t>
-            </a:r>
-          </a:p>
-        </p:txBody>
-      </p:sp>
-      <p:sp>
-        <p:nvSpPr>
-          <p:cNvPr id="3" name="C1-E32 round_rect 1" descr="sci-ppt:o001"/>
-          <p:cNvSpPr/>
-          <p:nvPr/>
-        </p:nvSpPr>
-        <p:spPr>
-          <a:xfrm>
-            <a:off x="457200" y="1280160"/>
-            <a:ext cx="2503170" cy="1554480"/>
-          </a:xfrm>
-          <a:prstGeom prst="roundRect">
-            <a:avLst/>
-          </a:prstGeom>
-          <a:solidFill>
-            <a:srgbClr val="213E4B"/>
-          </a:solidFill>
-          <a:ln w="20320">
+              <a:t>C1-E32 · Original formulas quoted for defense 2</a:t>
+            </a:r>
+          </a:p>
+        </p:txBody>
+      </p:sp>
+      <p:cxnSp>
+        <p:nvCxnSpPr>
+          <p:cNvPr id="3" name="C1-E32 line 1" descr="sci-ppt:o001"/>
+          <p:cNvCxnSpPr/>
+          <p:nvPr/>
+        </p:nvCxnSpPr>
+        <p:spPr>
+          <a:xfrm>
+            <a:off x="822960" y="4572000"/>
+            <a:ext cx="3291840" cy="0"/>
+          </a:xfrm>
+          <a:prstGeom prst="line">
+            <a:avLst/>
+          </a:prstGeom>
+          <a:ln w="19050">
             <a:solidFill>
-              <a:srgbClr val="F2B880"/>
+              <a:srgbClr val="B4C7D2"/>
             </a:solidFill>
           </a:ln>
           <a:effectLst/>
         </p:spPr>
-        <p:txBody>
-          <a:bodyPr rtlCol="0" anchor="ctr"/>
-          <a:lstStyle/>
-          <a:p>
-            <a:pPr algn="ctr"/>
-          </a:p>
-        </p:txBody>
-      </p:sp>
-      <p:sp>
-        <p:nvSpPr>
-          <p:cNvPr id="4" name="C1-E32 text 2" descr="sci-ppt:o002"/>
+      </p:cxnSp>
+      <p:cxnSp>
+        <p:nvCxnSpPr>
+          <p:cNvPr id="4" name="C1-E32 line 2" descr="sci-ppt:o002"/>
+          <p:cNvCxnSpPr/>
+          <p:nvPr/>
+        </p:nvCxnSpPr>
+        <p:spPr>
+          <a:xfrm>
+            <a:off x="822960" y="1554480"/>
+            <a:ext cx="0" cy="3017520"/>
+          </a:xfrm>
+          <a:prstGeom prst="line">
+            <a:avLst/>
+          </a:prstGeom>
+          <a:ln w="19050">
+            <a:solidFill>
+              <a:srgbClr val="B4C7D2"/>
+            </a:solidFill>
+          </a:ln>
+          <a:effectLst/>
+        </p:spPr>
+      </p:cxnSp>
+      <p:cxnSp>
+        <p:nvCxnSpPr>
+          <p:cNvPr id="5" name="C1-E32 line 3" descr="sci-ppt:o003"/>
+          <p:cNvCxnSpPr/>
+          <p:nvPr/>
+        </p:nvCxnSpPr>
+        <p:spPr>
+          <a:xfrm>
+            <a:off x="822960" y="4572000"/>
+            <a:ext cx="0" cy="64008"/>
+          </a:xfrm>
+          <a:prstGeom prst="line">
+            <a:avLst/>
+          </a:prstGeom>
+          <a:ln w="12700">
+            <a:solidFill>
+              <a:srgbClr val="B4C7D2"/>
+            </a:solidFill>
+          </a:ln>
+          <a:effectLst/>
+        </p:spPr>
+      </p:cxnSp>
+      <p:cxnSp>
+        <p:nvCxnSpPr>
+          <p:cNvPr id="6" name="C1-E32 line 4" descr="sci-ppt:o004"/>
+          <p:cNvCxnSpPr/>
+          <p:nvPr/>
+        </p:nvCxnSpPr>
+        <p:spPr>
+          <a:xfrm>
+            <a:off x="822960" y="1554480"/>
+            <a:ext cx="0" cy="3017520"/>
+          </a:xfrm>
+          <a:prstGeom prst="line">
+            <a:avLst/>
+          </a:prstGeom>
+          <a:ln w="7620">
+            <a:solidFill>
+              <a:srgbClr val="2E4756"/>
+            </a:solidFill>
+          </a:ln>
+          <a:effectLst/>
+        </p:spPr>
+      </p:cxnSp>
+      <p:sp>
+        <p:nvSpPr>
+          <p:cNvPr id="7" name="C1-E32 text 5" descr="sci-ppt:o005"/>
           <p:cNvSpPr txBox="1"/>
           <p:nvPr/>
         </p:nvSpPr>
         <p:spPr>
           <a:xfrm>
-            <a:off x="530352" y="1335024"/>
-            <a:ext cx="2356866" cy="254889"/>
+            <a:off x="365760" y="4654296"/>
+            <a:ext cx="914400" cy="208407"/>
           </a:xfrm>
           <a:prstGeom prst="rect">
             <a:avLst/>
@@ -3197,27 +3253,3540 @@
               </a:spcAft>
             </a:pPr>
             <a:r>
-              <a:rPr sz="1350" b="1" i="0">
+              <a:rPr sz="1050" b="0" i="0">
+                <a:solidFill>
+                  <a:srgbClr val="B4C7D2"/>
+                </a:solidFill>
+                <a:latin typeface="Arial"/>
+              </a:rPr>
+              <a:t>0.05</a:t>
+            </a:r>
+          </a:p>
+        </p:txBody>
+      </p:sp>
+      <p:cxnSp>
+        <p:nvCxnSpPr>
+          <p:cNvPr id="8" name="C1-E32 line 6" descr="sci-ppt:o006"/>
+          <p:cNvCxnSpPr/>
+          <p:nvPr/>
+        </p:nvCxnSpPr>
+        <p:spPr>
+          <a:xfrm>
+            <a:off x="1584620" y="4572000"/>
+            <a:ext cx="0" cy="64008"/>
+          </a:xfrm>
+          <a:prstGeom prst="line">
+            <a:avLst/>
+          </a:prstGeom>
+          <a:ln w="12700">
+            <a:solidFill>
+              <a:srgbClr val="B4C7D2"/>
+            </a:solidFill>
+          </a:ln>
+          <a:effectLst/>
+        </p:spPr>
+      </p:cxnSp>
+      <p:cxnSp>
+        <p:nvCxnSpPr>
+          <p:cNvPr id="9" name="C1-E32 line 7" descr="sci-ppt:o007"/>
+          <p:cNvCxnSpPr/>
+          <p:nvPr/>
+        </p:nvCxnSpPr>
+        <p:spPr>
+          <a:xfrm>
+            <a:off x="1584620" y="1554480"/>
+            <a:ext cx="0" cy="3017520"/>
+          </a:xfrm>
+          <a:prstGeom prst="line">
+            <a:avLst/>
+          </a:prstGeom>
+          <a:ln w="7620">
+            <a:solidFill>
+              <a:srgbClr val="2E4756"/>
+            </a:solidFill>
+          </a:ln>
+          <a:effectLst/>
+        </p:spPr>
+      </p:cxnSp>
+      <p:sp>
+        <p:nvSpPr>
+          <p:cNvPr id="10" name="C1-E32 text 8" descr="sci-ppt:o008"/>
+          <p:cNvSpPr txBox="1"/>
+          <p:nvPr/>
+        </p:nvSpPr>
+        <p:spPr>
+          <a:xfrm>
+            <a:off x="1127420" y="4654296"/>
+            <a:ext cx="914400" cy="208407"/>
+          </a:xfrm>
+          <a:prstGeom prst="rect">
+            <a:avLst/>
+          </a:prstGeom>
+          <a:noFill/>
+          <a:effectLst/>
+        </p:spPr>
+        <p:txBody>
+          <a:bodyPr wrap="none" lIns="18288" rIns="18288" tIns="18288" bIns="18288" anchor="t">
+            <a:spAutoFit/>
+          </a:bodyPr>
+          <a:lstStyle/>
+          <a:p>
+            <a:pPr algn="ctr">
+              <a:spcAft>
+                <a:spcPts val="0"/>
+              </a:spcAft>
+            </a:pPr>
+            <a:r>
+              <a:rPr sz="1050" b="0" i="0">
+                <a:solidFill>
+                  <a:srgbClr val="B4C7D2"/>
+                </a:solidFill>
+                <a:latin typeface="Arial"/>
+              </a:rPr>
+              <a:t>0.1</a:t>
+            </a:r>
+          </a:p>
+        </p:txBody>
+      </p:sp>
+      <p:cxnSp>
+        <p:nvCxnSpPr>
+          <p:cNvPr id="11" name="C1-E32 line 9" descr="sci-ppt:o009"/>
+          <p:cNvCxnSpPr/>
+          <p:nvPr/>
+        </p:nvCxnSpPr>
+        <p:spPr>
+          <a:xfrm>
+            <a:off x="3353139" y="4572000"/>
+            <a:ext cx="0" cy="64008"/>
+          </a:xfrm>
+          <a:prstGeom prst="line">
+            <a:avLst/>
+          </a:prstGeom>
+          <a:ln w="12700">
+            <a:solidFill>
+              <a:srgbClr val="B4C7D2"/>
+            </a:solidFill>
+          </a:ln>
+          <a:effectLst/>
+        </p:spPr>
+      </p:cxnSp>
+      <p:cxnSp>
+        <p:nvCxnSpPr>
+          <p:cNvPr id="12" name="C1-E32 line 10" descr="sci-ppt:o010"/>
+          <p:cNvCxnSpPr/>
+          <p:nvPr/>
+        </p:nvCxnSpPr>
+        <p:spPr>
+          <a:xfrm>
+            <a:off x="3353139" y="1554480"/>
+            <a:ext cx="0" cy="3017520"/>
+          </a:xfrm>
+          <a:prstGeom prst="line">
+            <a:avLst/>
+          </a:prstGeom>
+          <a:ln w="7620">
+            <a:solidFill>
+              <a:srgbClr val="2E4756"/>
+            </a:solidFill>
+          </a:ln>
+          <a:effectLst/>
+        </p:spPr>
+      </p:cxnSp>
+      <p:sp>
+        <p:nvSpPr>
+          <p:cNvPr id="13" name="C1-E32 text 11" descr="sci-ppt:o011"/>
+          <p:cNvSpPr txBox="1"/>
+          <p:nvPr/>
+        </p:nvSpPr>
+        <p:spPr>
+          <a:xfrm>
+            <a:off x="2895939" y="4654296"/>
+            <a:ext cx="914400" cy="208407"/>
+          </a:xfrm>
+          <a:prstGeom prst="rect">
+            <a:avLst/>
+          </a:prstGeom>
+          <a:noFill/>
+          <a:effectLst/>
+        </p:spPr>
+        <p:txBody>
+          <a:bodyPr wrap="none" lIns="18288" rIns="18288" tIns="18288" bIns="18288" anchor="t">
+            <a:spAutoFit/>
+          </a:bodyPr>
+          <a:lstStyle/>
+          <a:p>
+            <a:pPr algn="ctr">
+              <a:spcAft>
+                <a:spcPts val="0"/>
+              </a:spcAft>
+            </a:pPr>
+            <a:r>
+              <a:rPr sz="1050" b="0" i="0">
+                <a:solidFill>
+                  <a:srgbClr val="B4C7D2"/>
+                </a:solidFill>
+                <a:latin typeface="Arial"/>
+              </a:rPr>
+              <a:t>0.5</a:t>
+            </a:r>
+          </a:p>
+        </p:txBody>
+      </p:sp>
+      <p:cxnSp>
+        <p:nvCxnSpPr>
+          <p:cNvPr id="14" name="C1-E32 line 12" descr="sci-ppt:o012"/>
+          <p:cNvCxnSpPr/>
+          <p:nvPr/>
+        </p:nvCxnSpPr>
+        <p:spPr>
+          <a:xfrm>
+            <a:off x="4114800" y="4572000"/>
+            <a:ext cx="0" cy="64008"/>
+          </a:xfrm>
+          <a:prstGeom prst="line">
+            <a:avLst/>
+          </a:prstGeom>
+          <a:ln w="12700">
+            <a:solidFill>
+              <a:srgbClr val="B4C7D2"/>
+            </a:solidFill>
+          </a:ln>
+          <a:effectLst/>
+        </p:spPr>
+      </p:cxnSp>
+      <p:cxnSp>
+        <p:nvCxnSpPr>
+          <p:cNvPr id="15" name="C1-E32 line 13" descr="sci-ppt:o013"/>
+          <p:cNvCxnSpPr/>
+          <p:nvPr/>
+        </p:nvCxnSpPr>
+        <p:spPr>
+          <a:xfrm>
+            <a:off x="4114800" y="1554480"/>
+            <a:ext cx="0" cy="3017520"/>
+          </a:xfrm>
+          <a:prstGeom prst="line">
+            <a:avLst/>
+          </a:prstGeom>
+          <a:ln w="7620">
+            <a:solidFill>
+              <a:srgbClr val="2E4756"/>
+            </a:solidFill>
+          </a:ln>
+          <a:effectLst/>
+        </p:spPr>
+      </p:cxnSp>
+      <p:sp>
+        <p:nvSpPr>
+          <p:cNvPr id="16" name="C1-E32 text 14" descr="sci-ppt:o014"/>
+          <p:cNvSpPr txBox="1"/>
+          <p:nvPr/>
+        </p:nvSpPr>
+        <p:spPr>
+          <a:xfrm>
+            <a:off x="3657600" y="4654296"/>
+            <a:ext cx="914400" cy="208407"/>
+          </a:xfrm>
+          <a:prstGeom prst="rect">
+            <a:avLst/>
+          </a:prstGeom>
+          <a:noFill/>
+          <a:effectLst/>
+        </p:spPr>
+        <p:txBody>
+          <a:bodyPr wrap="none" lIns="18288" rIns="18288" tIns="18288" bIns="18288" anchor="t">
+            <a:spAutoFit/>
+          </a:bodyPr>
+          <a:lstStyle/>
+          <a:p>
+            <a:pPr algn="ctr">
+              <a:spcAft>
+                <a:spcPts val="0"/>
+              </a:spcAft>
+            </a:pPr>
+            <a:r>
+              <a:rPr sz="1050" b="0" i="0">
+                <a:solidFill>
+                  <a:srgbClr val="B4C7D2"/>
+                </a:solidFill>
+                <a:latin typeface="Arial"/>
+              </a:rPr>
+              <a:t>1</a:t>
+            </a:r>
+          </a:p>
+        </p:txBody>
+      </p:sp>
+      <p:cxnSp>
+        <p:nvCxnSpPr>
+          <p:cNvPr id="17" name="C1-E32 line 15" descr="sci-ppt:o015"/>
+          <p:cNvCxnSpPr/>
+          <p:nvPr/>
+        </p:nvCxnSpPr>
+        <p:spPr>
+          <a:xfrm>
+            <a:off x="758952" y="4572000"/>
+            <a:ext cx="64008" cy="0"/>
+          </a:xfrm>
+          <a:prstGeom prst="line">
+            <a:avLst/>
+          </a:prstGeom>
+          <a:ln w="12700">
+            <a:solidFill>
+              <a:srgbClr val="B4C7D2"/>
+            </a:solidFill>
+          </a:ln>
+          <a:effectLst/>
+        </p:spPr>
+      </p:cxnSp>
+      <p:cxnSp>
+        <p:nvCxnSpPr>
+          <p:cNvPr id="18" name="C1-E32 line 16" descr="sci-ppt:o016"/>
+          <p:cNvCxnSpPr/>
+          <p:nvPr/>
+        </p:nvCxnSpPr>
+        <p:spPr>
+          <a:xfrm>
+            <a:off x="758952" y="3566160"/>
+            <a:ext cx="64008" cy="0"/>
+          </a:xfrm>
+          <a:prstGeom prst="line">
+            <a:avLst/>
+          </a:prstGeom>
+          <a:ln w="12700">
+            <a:solidFill>
+              <a:srgbClr val="B4C7D2"/>
+            </a:solidFill>
+          </a:ln>
+          <a:effectLst/>
+        </p:spPr>
+      </p:cxnSp>
+      <p:cxnSp>
+        <p:nvCxnSpPr>
+          <p:cNvPr id="19" name="C1-E32 line 17" descr="sci-ppt:o017"/>
+          <p:cNvCxnSpPr/>
+          <p:nvPr/>
+        </p:nvCxnSpPr>
+        <p:spPr>
+          <a:xfrm>
+            <a:off x="822960" y="3566160"/>
+            <a:ext cx="3291840" cy="0"/>
+          </a:xfrm>
+          <a:prstGeom prst="line">
+            <a:avLst/>
+          </a:prstGeom>
+          <a:ln w="7620">
+            <a:solidFill>
+              <a:srgbClr val="2E4756"/>
+            </a:solidFill>
+          </a:ln>
+          <a:effectLst/>
+        </p:spPr>
+      </p:cxnSp>
+      <p:sp>
+        <p:nvSpPr>
+          <p:cNvPr id="20" name="C1-E32 text 18" descr="sci-ppt:o018"/>
+          <p:cNvSpPr txBox="1"/>
+          <p:nvPr/>
+        </p:nvSpPr>
+        <p:spPr>
+          <a:xfrm>
+            <a:off x="-45719" y="3483864"/>
+            <a:ext cx="777240" cy="208407"/>
+          </a:xfrm>
+          <a:prstGeom prst="rect">
+            <a:avLst/>
+          </a:prstGeom>
+          <a:noFill/>
+          <a:effectLst/>
+        </p:spPr>
+        <p:txBody>
+          <a:bodyPr wrap="none" lIns="18288" rIns="18288" tIns="18288" bIns="18288" anchor="t">
+            <a:spAutoFit/>
+          </a:bodyPr>
+          <a:lstStyle/>
+          <a:p>
+            <a:pPr algn="r">
+              <a:spcAft>
+                <a:spcPts val="0"/>
+              </a:spcAft>
+            </a:pPr>
+            <a:r>
+              <a:rPr sz="1050" b="0" i="0">
+                <a:solidFill>
+                  <a:srgbClr val="B4C7D2"/>
+                </a:solidFill>
+                <a:latin typeface="Arial"/>
+              </a:rPr>
+              <a:t>10</a:t>
+            </a:r>
+          </a:p>
+        </p:txBody>
+      </p:sp>
+      <p:cxnSp>
+        <p:nvCxnSpPr>
+          <p:cNvPr id="21" name="C1-E32 line 19" descr="sci-ppt:o019"/>
+          <p:cNvCxnSpPr/>
+          <p:nvPr/>
+        </p:nvCxnSpPr>
+        <p:spPr>
+          <a:xfrm>
+            <a:off x="758952" y="2560320"/>
+            <a:ext cx="64008" cy="0"/>
+          </a:xfrm>
+          <a:prstGeom prst="line">
+            <a:avLst/>
+          </a:prstGeom>
+          <a:ln w="12700">
+            <a:solidFill>
+              <a:srgbClr val="B4C7D2"/>
+            </a:solidFill>
+          </a:ln>
+          <a:effectLst/>
+        </p:spPr>
+      </p:cxnSp>
+      <p:cxnSp>
+        <p:nvCxnSpPr>
+          <p:cNvPr id="22" name="C1-E32 line 20" descr="sci-ppt:o020"/>
+          <p:cNvCxnSpPr/>
+          <p:nvPr/>
+        </p:nvCxnSpPr>
+        <p:spPr>
+          <a:xfrm>
+            <a:off x="822960" y="2560320"/>
+            <a:ext cx="3291840" cy="0"/>
+          </a:xfrm>
+          <a:prstGeom prst="line">
+            <a:avLst/>
+          </a:prstGeom>
+          <a:ln w="7620">
+            <a:solidFill>
+              <a:srgbClr val="2E4756"/>
+            </a:solidFill>
+          </a:ln>
+          <a:effectLst/>
+        </p:spPr>
+      </p:cxnSp>
+      <p:sp>
+        <p:nvSpPr>
+          <p:cNvPr id="23" name="C1-E32 text 21" descr="sci-ppt:o021"/>
+          <p:cNvSpPr txBox="1"/>
+          <p:nvPr/>
+        </p:nvSpPr>
+        <p:spPr>
+          <a:xfrm>
+            <a:off x="-45719" y="2478024"/>
+            <a:ext cx="777240" cy="208407"/>
+          </a:xfrm>
+          <a:prstGeom prst="rect">
+            <a:avLst/>
+          </a:prstGeom>
+          <a:noFill/>
+          <a:effectLst/>
+        </p:spPr>
+        <p:txBody>
+          <a:bodyPr wrap="none" lIns="18288" rIns="18288" tIns="18288" bIns="18288" anchor="t">
+            <a:spAutoFit/>
+          </a:bodyPr>
+          <a:lstStyle/>
+          <a:p>
+            <a:pPr algn="r">
+              <a:spcAft>
+                <a:spcPts val="0"/>
+              </a:spcAft>
+            </a:pPr>
+            <a:r>
+              <a:rPr sz="1050" b="0" i="0">
+                <a:solidFill>
+                  <a:srgbClr val="B4C7D2"/>
+                </a:solidFill>
+                <a:latin typeface="Arial"/>
+              </a:rPr>
+              <a:t>100</a:t>
+            </a:r>
+          </a:p>
+        </p:txBody>
+      </p:sp>
+      <p:cxnSp>
+        <p:nvCxnSpPr>
+          <p:cNvPr id="24" name="C1-E32 line 22" descr="sci-ppt:o022"/>
+          <p:cNvCxnSpPr/>
+          <p:nvPr/>
+        </p:nvCxnSpPr>
+        <p:spPr>
+          <a:xfrm>
+            <a:off x="758952" y="1554480"/>
+            <a:ext cx="64008" cy="0"/>
+          </a:xfrm>
+          <a:prstGeom prst="line">
+            <a:avLst/>
+          </a:prstGeom>
+          <a:ln w="12700">
+            <a:solidFill>
+              <a:srgbClr val="B4C7D2"/>
+            </a:solidFill>
+          </a:ln>
+          <a:effectLst/>
+        </p:spPr>
+      </p:cxnSp>
+      <p:cxnSp>
+        <p:nvCxnSpPr>
+          <p:cNvPr id="25" name="C1-E32 line 23" descr="sci-ppt:o023"/>
+          <p:cNvCxnSpPr/>
+          <p:nvPr/>
+        </p:nvCxnSpPr>
+        <p:spPr>
+          <a:xfrm>
+            <a:off x="822960" y="1554480"/>
+            <a:ext cx="3291840" cy="0"/>
+          </a:xfrm>
+          <a:prstGeom prst="line">
+            <a:avLst/>
+          </a:prstGeom>
+          <a:ln w="7620">
+            <a:solidFill>
+              <a:srgbClr val="2E4756"/>
+            </a:solidFill>
+          </a:ln>
+          <a:effectLst/>
+        </p:spPr>
+      </p:cxnSp>
+      <p:sp>
+        <p:nvSpPr>
+          <p:cNvPr id="26" name="C1-E32 text 24" descr="sci-ppt:o024"/>
+          <p:cNvSpPr txBox="1"/>
+          <p:nvPr/>
+        </p:nvSpPr>
+        <p:spPr>
+          <a:xfrm>
+            <a:off x="-45719" y="1472184"/>
+            <a:ext cx="777240" cy="208407"/>
+          </a:xfrm>
+          <a:prstGeom prst="rect">
+            <a:avLst/>
+          </a:prstGeom>
+          <a:noFill/>
+          <a:effectLst/>
+        </p:spPr>
+        <p:txBody>
+          <a:bodyPr wrap="none" lIns="18288" rIns="18288" tIns="18288" bIns="18288" anchor="t">
+            <a:spAutoFit/>
+          </a:bodyPr>
+          <a:lstStyle/>
+          <a:p>
+            <a:pPr algn="r">
+              <a:spcAft>
+                <a:spcPts val="0"/>
+              </a:spcAft>
+            </a:pPr>
+            <a:r>
+              <a:rPr sz="1050" b="0" i="0">
+                <a:solidFill>
+                  <a:srgbClr val="B4C7D2"/>
+                </a:solidFill>
+                <a:latin typeface="Arial"/>
+              </a:rPr>
+              <a:t>1000</a:t>
+            </a:r>
+          </a:p>
+        </p:txBody>
+      </p:sp>
+      <p:sp>
+        <p:nvSpPr>
+          <p:cNvPr id="27" name="C1-E32 text 25" descr="sci-ppt:o025"/>
+          <p:cNvSpPr txBox="1"/>
+          <p:nvPr/>
+        </p:nvSpPr>
+        <p:spPr>
+          <a:xfrm>
+            <a:off x="822960" y="4855464"/>
+            <a:ext cx="3291840" cy="231648"/>
+          </a:xfrm>
+          <a:prstGeom prst="rect">
+            <a:avLst/>
+          </a:prstGeom>
+          <a:noFill/>
+          <a:effectLst/>
+        </p:spPr>
+        <p:txBody>
+          <a:bodyPr wrap="none" lIns="18288" rIns="18288" tIns="18288" bIns="18288" anchor="t">
+            <a:spAutoFit/>
+          </a:bodyPr>
+          <a:lstStyle/>
+          <a:p>
+            <a:pPr algn="ctr">
+              <a:spcAft>
+                <a:spcPts val="0"/>
+              </a:spcAft>
+            </a:pPr>
+            <a:r>
+              <a:rPr sz="1200" b="0" i="0">
+                <a:solidFill>
+                  <a:srgbClr val="E7F0F3"/>
+                </a:solidFill>
+                <a:latin typeface="Arial"/>
+              </a:rPr>
+              <a:t>R / Rₘₐₓ</a:t>
+            </a:r>
+          </a:p>
+        </p:txBody>
+      </p:sp>
+      <p:sp>
+        <p:nvSpPr>
+          <p:cNvPr id="28" name="C1-E32 text 26" descr="sci-ppt:o026"/>
+          <p:cNvSpPr txBox="1"/>
+          <p:nvPr/>
+        </p:nvSpPr>
+        <p:spPr>
+          <a:xfrm>
+            <a:off x="274320" y="1207007"/>
+            <a:ext cx="3291840" cy="231648"/>
+          </a:xfrm>
+          <a:prstGeom prst="rect">
+            <a:avLst/>
+          </a:prstGeom>
+          <a:noFill/>
+          <a:effectLst/>
+        </p:spPr>
+        <p:txBody>
+          <a:bodyPr wrap="none" lIns="18288" rIns="18288" tIns="18288" bIns="18288" anchor="t">
+            <a:spAutoFit/>
+          </a:bodyPr>
+          <a:lstStyle/>
+          <a:p>
+            <a:pPr algn="l">
+              <a:spcAft>
+                <a:spcPts val="0"/>
+              </a:spcAft>
+            </a:pPr>
+            <a:r>
+              <a:rPr sz="1200" b="0" i="0">
+                <a:solidFill>
+                  <a:srgbClr val="E7F0F3"/>
+                </a:solidFill>
+                <a:latin typeface="Arial"/>
+              </a:rPr>
+              <a:t>|Ṙ| (m/s)</a:t>
+            </a:r>
+          </a:p>
+        </p:txBody>
+      </p:sp>
+      <p:sp>
+        <p:nvSpPr>
+          <p:cNvPr id="29" name="C1-E32 polygon 27" descr="sci-ppt:o027"/>
+          <p:cNvSpPr/>
+          <p:nvPr/>
+        </p:nvSpPr>
+        <p:spPr>
+          <a:xfrm>
+            <a:off x="825566" y="1693359"/>
+            <a:ext cx="3272705" cy="2633129"/>
+          </a:xfrm>
+          <a:custGeom>
+            <a:avLst/>
+            <a:gdLst/>
+            <a:ahLst/>
+            <a:cxnLst/>
+            <a:rect l="l" t="t" r="r" b="b"/>
+            <a:pathLst>
+              <a:path w="3272705" h="2633129">
+                <a:moveTo>
+                  <a:pt x="0" y="0"/>
+                </a:moveTo>
+                <a:lnTo>
+                  <a:pt x="16528" y="9857"/>
+                </a:lnTo>
+                <a:lnTo>
+                  <a:pt x="33057" y="19715"/>
+                </a:lnTo>
+                <a:lnTo>
+                  <a:pt x="49586" y="29572"/>
+                </a:lnTo>
+                <a:lnTo>
+                  <a:pt x="66115" y="39430"/>
+                </a:lnTo>
+                <a:lnTo>
+                  <a:pt x="82644" y="49288"/>
+                </a:lnTo>
+                <a:lnTo>
+                  <a:pt x="99172" y="59146"/>
+                </a:lnTo>
+                <a:lnTo>
+                  <a:pt x="115701" y="69004"/>
+                </a:lnTo>
+                <a:lnTo>
+                  <a:pt x="132230" y="78862"/>
+                </a:lnTo>
+                <a:lnTo>
+                  <a:pt x="148759" y="88720"/>
+                </a:lnTo>
+                <a:lnTo>
+                  <a:pt x="165288" y="98578"/>
+                </a:lnTo>
+                <a:lnTo>
+                  <a:pt x="181817" y="108436"/>
+                </a:lnTo>
+                <a:lnTo>
+                  <a:pt x="198345" y="118294"/>
+                </a:lnTo>
+                <a:lnTo>
+                  <a:pt x="214874" y="128153"/>
+                </a:lnTo>
+                <a:lnTo>
+                  <a:pt x="231403" y="138011"/>
+                </a:lnTo>
+                <a:lnTo>
+                  <a:pt x="247932" y="147870"/>
+                </a:lnTo>
+                <a:lnTo>
+                  <a:pt x="264461" y="157728"/>
+                </a:lnTo>
+                <a:lnTo>
+                  <a:pt x="280989" y="167587"/>
+                </a:lnTo>
+                <a:lnTo>
+                  <a:pt x="297518" y="177446"/>
+                </a:lnTo>
+                <a:lnTo>
+                  <a:pt x="314047" y="187305"/>
+                </a:lnTo>
+                <a:lnTo>
+                  <a:pt x="330576" y="197165"/>
+                </a:lnTo>
+                <a:lnTo>
+                  <a:pt x="347105" y="207024"/>
+                </a:lnTo>
+                <a:lnTo>
+                  <a:pt x="363633" y="216883"/>
+                </a:lnTo>
+                <a:lnTo>
+                  <a:pt x="380162" y="226743"/>
+                </a:lnTo>
+                <a:lnTo>
+                  <a:pt x="396691" y="236603"/>
+                </a:lnTo>
+                <a:lnTo>
+                  <a:pt x="413220" y="246463"/>
+                </a:lnTo>
+                <a:lnTo>
+                  <a:pt x="429749" y="256323"/>
+                </a:lnTo>
+                <a:lnTo>
+                  <a:pt x="446278" y="266183"/>
+                </a:lnTo>
+                <a:lnTo>
+                  <a:pt x="462806" y="276044"/>
+                </a:lnTo>
+                <a:lnTo>
+                  <a:pt x="479335" y="285905"/>
+                </a:lnTo>
+                <a:lnTo>
+                  <a:pt x="495864" y="295765"/>
+                </a:lnTo>
+                <a:lnTo>
+                  <a:pt x="512393" y="305627"/>
+                </a:lnTo>
+                <a:lnTo>
+                  <a:pt x="528922" y="315488"/>
+                </a:lnTo>
+                <a:lnTo>
+                  <a:pt x="545450" y="325350"/>
+                </a:lnTo>
+                <a:lnTo>
+                  <a:pt x="561979" y="335211"/>
+                </a:lnTo>
+                <a:lnTo>
+                  <a:pt x="578508" y="345074"/>
+                </a:lnTo>
+                <a:lnTo>
+                  <a:pt x="595037" y="354936"/>
+                </a:lnTo>
+                <a:lnTo>
+                  <a:pt x="611566" y="364799"/>
+                </a:lnTo>
+                <a:lnTo>
+                  <a:pt x="628094" y="374662"/>
+                </a:lnTo>
+                <a:lnTo>
+                  <a:pt x="644623" y="384525"/>
+                </a:lnTo>
+                <a:lnTo>
+                  <a:pt x="661152" y="394388"/>
+                </a:lnTo>
+                <a:lnTo>
+                  <a:pt x="677681" y="404252"/>
+                </a:lnTo>
+                <a:lnTo>
+                  <a:pt x="694210" y="414117"/>
+                </a:lnTo>
+                <a:lnTo>
+                  <a:pt x="710739" y="423981"/>
+                </a:lnTo>
+                <a:lnTo>
+                  <a:pt x="727267" y="433846"/>
+                </a:lnTo>
+                <a:lnTo>
+                  <a:pt x="743796" y="443712"/>
+                </a:lnTo>
+                <a:lnTo>
+                  <a:pt x="760325" y="453578"/>
+                </a:lnTo>
+                <a:lnTo>
+                  <a:pt x="776854" y="463444"/>
+                </a:lnTo>
+                <a:lnTo>
+                  <a:pt x="793383" y="473311"/>
+                </a:lnTo>
+                <a:lnTo>
+                  <a:pt x="809911" y="483178"/>
+                </a:lnTo>
+                <a:lnTo>
+                  <a:pt x="826440" y="493046"/>
+                </a:lnTo>
+                <a:lnTo>
+                  <a:pt x="842969" y="502914"/>
+                </a:lnTo>
+                <a:lnTo>
+                  <a:pt x="859498" y="512783"/>
+                </a:lnTo>
+                <a:lnTo>
+                  <a:pt x="876027" y="522653"/>
+                </a:lnTo>
+                <a:lnTo>
+                  <a:pt x="892556" y="532523"/>
+                </a:lnTo>
+                <a:lnTo>
+                  <a:pt x="909084" y="542394"/>
+                </a:lnTo>
+                <a:lnTo>
+                  <a:pt x="925613" y="552265"/>
+                </a:lnTo>
+                <a:lnTo>
+                  <a:pt x="942142" y="562137"/>
+                </a:lnTo>
+                <a:lnTo>
+                  <a:pt x="958671" y="572010"/>
+                </a:lnTo>
+                <a:lnTo>
+                  <a:pt x="975200" y="581884"/>
+                </a:lnTo>
+                <a:lnTo>
+                  <a:pt x="991728" y="591758"/>
+                </a:lnTo>
+                <a:lnTo>
+                  <a:pt x="1008257" y="601634"/>
+                </a:lnTo>
+                <a:lnTo>
+                  <a:pt x="1024786" y="611510"/>
+                </a:lnTo>
+                <a:lnTo>
+                  <a:pt x="1041315" y="621387"/>
+                </a:lnTo>
+                <a:lnTo>
+                  <a:pt x="1057844" y="631265"/>
+                </a:lnTo>
+                <a:lnTo>
+                  <a:pt x="1074372" y="641144"/>
+                </a:lnTo>
+                <a:lnTo>
+                  <a:pt x="1090901" y="651024"/>
+                </a:lnTo>
+                <a:lnTo>
+                  <a:pt x="1107430" y="660905"/>
+                </a:lnTo>
+                <a:lnTo>
+                  <a:pt x="1123959" y="670788"/>
+                </a:lnTo>
+                <a:lnTo>
+                  <a:pt x="1140488" y="680671"/>
+                </a:lnTo>
+                <a:lnTo>
+                  <a:pt x="1157017" y="690556"/>
+                </a:lnTo>
+                <a:lnTo>
+                  <a:pt x="1173545" y="700442"/>
+                </a:lnTo>
+                <a:lnTo>
+                  <a:pt x="1190074" y="710330"/>
+                </a:lnTo>
+                <a:lnTo>
+                  <a:pt x="1206603" y="720219"/>
+                </a:lnTo>
+                <a:lnTo>
+                  <a:pt x="1223132" y="730109"/>
+                </a:lnTo>
+                <a:lnTo>
+                  <a:pt x="1239661" y="740002"/>
+                </a:lnTo>
+                <a:lnTo>
+                  <a:pt x="1256189" y="749895"/>
+                </a:lnTo>
+                <a:lnTo>
+                  <a:pt x="1272718" y="759791"/>
+                </a:lnTo>
+                <a:lnTo>
+                  <a:pt x="1289247" y="769688"/>
+                </a:lnTo>
+                <a:lnTo>
+                  <a:pt x="1305776" y="779588"/>
+                </a:lnTo>
+                <a:lnTo>
+                  <a:pt x="1322305" y="789489"/>
+                </a:lnTo>
+                <a:lnTo>
+                  <a:pt x="1338833" y="799392"/>
+                </a:lnTo>
+                <a:lnTo>
+                  <a:pt x="1355362" y="809298"/>
+                </a:lnTo>
+                <a:lnTo>
+                  <a:pt x="1371891" y="819206"/>
+                </a:lnTo>
+                <a:lnTo>
+                  <a:pt x="1388420" y="829116"/>
+                </a:lnTo>
+                <a:lnTo>
+                  <a:pt x="1404949" y="839029"/>
+                </a:lnTo>
+                <a:lnTo>
+                  <a:pt x="1421478" y="848944"/>
+                </a:lnTo>
+                <a:lnTo>
+                  <a:pt x="1438006" y="858862"/>
+                </a:lnTo>
+                <a:lnTo>
+                  <a:pt x="1454535" y="868783"/>
+                </a:lnTo>
+                <a:lnTo>
+                  <a:pt x="1471064" y="878707"/>
+                </a:lnTo>
+                <a:lnTo>
+                  <a:pt x="1487593" y="888634"/>
+                </a:lnTo>
+                <a:lnTo>
+                  <a:pt x="1504122" y="898565"/>
+                </a:lnTo>
+                <a:lnTo>
+                  <a:pt x="1520650" y="908499"/>
+                </a:lnTo>
+                <a:lnTo>
+                  <a:pt x="1537179" y="918436"/>
+                </a:lnTo>
+                <a:lnTo>
+                  <a:pt x="1553708" y="928378"/>
+                </a:lnTo>
+                <a:lnTo>
+                  <a:pt x="1570237" y="938323"/>
+                </a:lnTo>
+                <a:lnTo>
+                  <a:pt x="1586766" y="948272"/>
+                </a:lnTo>
+                <a:lnTo>
+                  <a:pt x="1603295" y="958226"/>
+                </a:lnTo>
+                <a:lnTo>
+                  <a:pt x="1619823" y="968184"/>
+                </a:lnTo>
+                <a:lnTo>
+                  <a:pt x="1636352" y="978147"/>
+                </a:lnTo>
+                <a:lnTo>
+                  <a:pt x="1652881" y="988116"/>
+                </a:lnTo>
+                <a:lnTo>
+                  <a:pt x="1669410" y="998089"/>
+                </a:lnTo>
+                <a:lnTo>
+                  <a:pt x="1685939" y="1008068"/>
+                </a:lnTo>
+                <a:lnTo>
+                  <a:pt x="1702467" y="1018052"/>
+                </a:lnTo>
+                <a:lnTo>
+                  <a:pt x="1718996" y="1028043"/>
+                </a:lnTo>
+                <a:lnTo>
+                  <a:pt x="1735525" y="1038039"/>
+                </a:lnTo>
+                <a:lnTo>
+                  <a:pt x="1752054" y="1048043"/>
+                </a:lnTo>
+                <a:lnTo>
+                  <a:pt x="1768583" y="1058053"/>
+                </a:lnTo>
+                <a:lnTo>
+                  <a:pt x="1785111" y="1068071"/>
+                </a:lnTo>
+                <a:lnTo>
+                  <a:pt x="1801640" y="1078096"/>
+                </a:lnTo>
+                <a:lnTo>
+                  <a:pt x="1818169" y="1088129"/>
+                </a:lnTo>
+                <a:lnTo>
+                  <a:pt x="1834698" y="1098170"/>
+                </a:lnTo>
+                <a:lnTo>
+                  <a:pt x="1851227" y="1108220"/>
+                </a:lnTo>
+                <a:lnTo>
+                  <a:pt x="1867756" y="1118279"/>
+                </a:lnTo>
+                <a:lnTo>
+                  <a:pt x="1884284" y="1128348"/>
+                </a:lnTo>
+                <a:lnTo>
+                  <a:pt x="1900813" y="1138427"/>
+                </a:lnTo>
+                <a:lnTo>
+                  <a:pt x="1917342" y="1148516"/>
+                </a:lnTo>
+                <a:lnTo>
+                  <a:pt x="1933871" y="1158616"/>
+                </a:lnTo>
+                <a:lnTo>
+                  <a:pt x="1950400" y="1168728"/>
+                </a:lnTo>
+                <a:lnTo>
+                  <a:pt x="1966928" y="1178852"/>
+                </a:lnTo>
+                <a:lnTo>
+                  <a:pt x="1983457" y="1188989"/>
+                </a:lnTo>
+                <a:lnTo>
+                  <a:pt x="1999986" y="1199139"/>
+                </a:lnTo>
+                <a:lnTo>
+                  <a:pt x="2016515" y="1209303"/>
+                </a:lnTo>
+                <a:lnTo>
+                  <a:pt x="2033044" y="1219481"/>
+                </a:lnTo>
+                <a:lnTo>
+                  <a:pt x="2049572" y="1229676"/>
+                </a:lnTo>
+                <a:lnTo>
+                  <a:pt x="2066101" y="1239886"/>
+                </a:lnTo>
+                <a:lnTo>
+                  <a:pt x="2082630" y="1250113"/>
+                </a:lnTo>
+                <a:lnTo>
+                  <a:pt x="2099159" y="1260358"/>
+                </a:lnTo>
+                <a:lnTo>
+                  <a:pt x="2115688" y="1270622"/>
+                </a:lnTo>
+                <a:lnTo>
+                  <a:pt x="2132217" y="1280905"/>
+                </a:lnTo>
+                <a:lnTo>
+                  <a:pt x="2148745" y="1291209"/>
+                </a:lnTo>
+                <a:lnTo>
+                  <a:pt x="2165274" y="1301534"/>
+                </a:lnTo>
+                <a:lnTo>
+                  <a:pt x="2181803" y="1311883"/>
+                </a:lnTo>
+                <a:lnTo>
+                  <a:pt x="2198332" y="1322255"/>
+                </a:lnTo>
+                <a:lnTo>
+                  <a:pt x="2214861" y="1332652"/>
+                </a:lnTo>
+                <a:lnTo>
+                  <a:pt x="2231389" y="1343076"/>
+                </a:lnTo>
+                <a:lnTo>
+                  <a:pt x="2247918" y="1353528"/>
+                </a:lnTo>
+                <a:lnTo>
+                  <a:pt x="2264447" y="1364008"/>
+                </a:lnTo>
+                <a:lnTo>
+                  <a:pt x="2280976" y="1374520"/>
+                </a:lnTo>
+                <a:lnTo>
+                  <a:pt x="2297505" y="1385064"/>
+                </a:lnTo>
+                <a:lnTo>
+                  <a:pt x="2314033" y="1395642"/>
+                </a:lnTo>
+                <a:lnTo>
+                  <a:pt x="2330562" y="1406256"/>
+                </a:lnTo>
+                <a:lnTo>
+                  <a:pt x="2347091" y="1416907"/>
+                </a:lnTo>
+                <a:lnTo>
+                  <a:pt x="2363620" y="1427599"/>
+                </a:lnTo>
+                <a:lnTo>
+                  <a:pt x="2380149" y="1438332"/>
+                </a:lnTo>
+                <a:lnTo>
+                  <a:pt x="2396678" y="1449110"/>
+                </a:lnTo>
+                <a:lnTo>
+                  <a:pt x="2413206" y="1459934"/>
+                </a:lnTo>
+                <a:lnTo>
+                  <a:pt x="2429735" y="1470808"/>
+                </a:lnTo>
+                <a:lnTo>
+                  <a:pt x="2446264" y="1481733"/>
+                </a:lnTo>
+                <a:lnTo>
+                  <a:pt x="2462793" y="1492714"/>
+                </a:lnTo>
+                <a:lnTo>
+                  <a:pt x="2479322" y="1503753"/>
+                </a:lnTo>
+                <a:lnTo>
+                  <a:pt x="2495850" y="1514854"/>
+                </a:lnTo>
+                <a:lnTo>
+                  <a:pt x="2512379" y="1526019"/>
+                </a:lnTo>
+                <a:lnTo>
+                  <a:pt x="2528908" y="1537253"/>
+                </a:lnTo>
+                <a:lnTo>
+                  <a:pt x="2545437" y="1548561"/>
+                </a:lnTo>
+                <a:lnTo>
+                  <a:pt x="2561966" y="1559945"/>
+                </a:lnTo>
+                <a:lnTo>
+                  <a:pt x="2578495" y="1571412"/>
+                </a:lnTo>
+                <a:lnTo>
+                  <a:pt x="2595023" y="1582966"/>
+                </a:lnTo>
+                <a:lnTo>
+                  <a:pt x="2611552" y="1594613"/>
+                </a:lnTo>
+                <a:lnTo>
+                  <a:pt x="2628081" y="1606358"/>
+                </a:lnTo>
+                <a:lnTo>
+                  <a:pt x="2644610" y="1618208"/>
+                </a:lnTo>
+                <a:lnTo>
+                  <a:pt x="2661139" y="1630169"/>
+                </a:lnTo>
+                <a:lnTo>
+                  <a:pt x="2677667" y="1642250"/>
+                </a:lnTo>
+                <a:lnTo>
+                  <a:pt x="2694196" y="1654458"/>
+                </a:lnTo>
+                <a:lnTo>
+                  <a:pt x="2710725" y="1666801"/>
+                </a:lnTo>
+                <a:lnTo>
+                  <a:pt x="2727254" y="1679291"/>
+                </a:lnTo>
+                <a:lnTo>
+                  <a:pt x="2743783" y="1691936"/>
+                </a:lnTo>
+                <a:lnTo>
+                  <a:pt x="2760311" y="1704749"/>
+                </a:lnTo>
+                <a:lnTo>
+                  <a:pt x="2776840" y="1717741"/>
+                </a:lnTo>
+                <a:lnTo>
+                  <a:pt x="2793369" y="1730927"/>
+                </a:lnTo>
+                <a:lnTo>
+                  <a:pt x="2809898" y="1744322"/>
+                </a:lnTo>
+                <a:lnTo>
+                  <a:pt x="2826427" y="1757943"/>
+                </a:lnTo>
+                <a:lnTo>
+                  <a:pt x="2842956" y="1771809"/>
+                </a:lnTo>
+                <a:lnTo>
+                  <a:pt x="2859484" y="1785939"/>
+                </a:lnTo>
+                <a:lnTo>
+                  <a:pt x="2876013" y="1800359"/>
+                </a:lnTo>
+                <a:lnTo>
+                  <a:pt x="2892542" y="1815093"/>
+                </a:lnTo>
+                <a:lnTo>
+                  <a:pt x="2909071" y="1830172"/>
+                </a:lnTo>
+                <a:lnTo>
+                  <a:pt x="2925600" y="1845629"/>
+                </a:lnTo>
+                <a:lnTo>
+                  <a:pt x="2942128" y="1861503"/>
+                </a:lnTo>
+                <a:lnTo>
+                  <a:pt x="2958657" y="1877836"/>
+                </a:lnTo>
+                <a:lnTo>
+                  <a:pt x="2975186" y="1894681"/>
+                </a:lnTo>
+                <a:lnTo>
+                  <a:pt x="2991715" y="1912096"/>
+                </a:lnTo>
+                <a:lnTo>
+                  <a:pt x="3008244" y="1930151"/>
+                </a:lnTo>
+                <a:lnTo>
+                  <a:pt x="3024772" y="1948926"/>
+                </a:lnTo>
+                <a:lnTo>
+                  <a:pt x="3041301" y="1968520"/>
+                </a:lnTo>
+                <a:lnTo>
+                  <a:pt x="3057830" y="1989051"/>
+                </a:lnTo>
+                <a:lnTo>
+                  <a:pt x="3074359" y="2010663"/>
+                </a:lnTo>
+                <a:lnTo>
+                  <a:pt x="3090888" y="2033534"/>
+                </a:lnTo>
+                <a:lnTo>
+                  <a:pt x="3107417" y="2057892"/>
+                </a:lnTo>
+                <a:lnTo>
+                  <a:pt x="3123945" y="2084025"/>
+                </a:lnTo>
+                <a:lnTo>
+                  <a:pt x="3140474" y="2112316"/>
+                </a:lnTo>
+                <a:lnTo>
+                  <a:pt x="3157003" y="2143284"/>
+                </a:lnTo>
+                <a:lnTo>
+                  <a:pt x="3173532" y="2177655"/>
+                </a:lnTo>
+                <a:lnTo>
+                  <a:pt x="3190061" y="2216493"/>
+                </a:lnTo>
+                <a:lnTo>
+                  <a:pt x="3206589" y="2261446"/>
+                </a:lnTo>
+                <a:lnTo>
+                  <a:pt x="3223118" y="2315279"/>
+                </a:lnTo>
+                <a:lnTo>
+                  <a:pt x="3239647" y="2383171"/>
+                </a:lnTo>
+                <a:lnTo>
+                  <a:pt x="3256176" y="2476751"/>
+                </a:lnTo>
+                <a:lnTo>
+                  <a:pt x="3272705" y="2633129"/>
+                </a:lnTo>
+              </a:path>
+            </a:pathLst>
+          </a:custGeom>
+          <a:noFill/>
+          <a:ln w="38100">
+            <a:solidFill>
+              <a:srgbClr val="8EDBD4"/>
+            </a:solidFill>
+          </a:ln>
+          <a:effectLst/>
+        </p:spPr>
+        <p:txBody>
+          <a:bodyPr rtlCol="0" anchor="ctr"/>
+          <a:lstStyle/>
+          <a:p>
+            <a:pPr algn="ctr"/>
+          </a:p>
+        </p:txBody>
+      </p:sp>
+      <p:cxnSp>
+        <p:nvCxnSpPr>
+          <p:cNvPr id="30" name="C1-E32 line 28" descr="sci-ppt:o028"/>
+          <p:cNvCxnSpPr/>
+          <p:nvPr/>
+        </p:nvCxnSpPr>
+        <p:spPr>
+          <a:xfrm>
+            <a:off x="4937760" y="4572000"/>
+            <a:ext cx="3291840" cy="0"/>
+          </a:xfrm>
+          <a:prstGeom prst="line">
+            <a:avLst/>
+          </a:prstGeom>
+          <a:ln w="19050">
+            <a:solidFill>
+              <a:srgbClr val="B4C7D2"/>
+            </a:solidFill>
+          </a:ln>
+          <a:effectLst/>
+        </p:spPr>
+      </p:cxnSp>
+      <p:cxnSp>
+        <p:nvCxnSpPr>
+          <p:cNvPr id="31" name="C1-E32 line 29" descr="sci-ppt:o029"/>
+          <p:cNvCxnSpPr/>
+          <p:nvPr/>
+        </p:nvCxnSpPr>
+        <p:spPr>
+          <a:xfrm>
+            <a:off x="4937760" y="1554480"/>
+            <a:ext cx="0" cy="3017520"/>
+          </a:xfrm>
+          <a:prstGeom prst="line">
+            <a:avLst/>
+          </a:prstGeom>
+          <a:ln w="19050">
+            <a:solidFill>
+              <a:srgbClr val="B4C7D2"/>
+            </a:solidFill>
+          </a:ln>
+          <a:effectLst/>
+        </p:spPr>
+      </p:cxnSp>
+      <p:cxnSp>
+        <p:nvCxnSpPr>
+          <p:cNvPr id="32" name="C1-E32 line 30" descr="sci-ppt:o030"/>
+          <p:cNvCxnSpPr/>
+          <p:nvPr/>
+        </p:nvCxnSpPr>
+        <p:spPr>
+          <a:xfrm>
+            <a:off x="4937760" y="4572000"/>
+            <a:ext cx="0" cy="64008"/>
+          </a:xfrm>
+          <a:prstGeom prst="line">
+            <a:avLst/>
+          </a:prstGeom>
+          <a:ln w="12700">
+            <a:solidFill>
+              <a:srgbClr val="B4C7D2"/>
+            </a:solidFill>
+          </a:ln>
+          <a:effectLst/>
+        </p:spPr>
+      </p:cxnSp>
+      <p:cxnSp>
+        <p:nvCxnSpPr>
+          <p:cNvPr id="33" name="C1-E32 line 31" descr="sci-ppt:o031"/>
+          <p:cNvCxnSpPr/>
+          <p:nvPr/>
+        </p:nvCxnSpPr>
+        <p:spPr>
+          <a:xfrm>
+            <a:off x="4937760" y="1554480"/>
+            <a:ext cx="0" cy="3017520"/>
+          </a:xfrm>
+          <a:prstGeom prst="line">
+            <a:avLst/>
+          </a:prstGeom>
+          <a:ln w="7620">
+            <a:solidFill>
+              <a:srgbClr val="2E4756"/>
+            </a:solidFill>
+          </a:ln>
+          <a:effectLst/>
+        </p:spPr>
+      </p:cxnSp>
+      <p:sp>
+        <p:nvSpPr>
+          <p:cNvPr id="34" name="C1-E32 text 32" descr="sci-ppt:o032"/>
+          <p:cNvSpPr txBox="1"/>
+          <p:nvPr/>
+        </p:nvSpPr>
+        <p:spPr>
+          <a:xfrm>
+            <a:off x="4480560" y="4654296"/>
+            <a:ext cx="914400" cy="208407"/>
+          </a:xfrm>
+          <a:prstGeom prst="rect">
+            <a:avLst/>
+          </a:prstGeom>
+          <a:noFill/>
+          <a:effectLst/>
+        </p:spPr>
+        <p:txBody>
+          <a:bodyPr wrap="none" lIns="18288" rIns="18288" tIns="18288" bIns="18288" anchor="t">
+            <a:spAutoFit/>
+          </a:bodyPr>
+          <a:lstStyle/>
+          <a:p>
+            <a:pPr algn="ctr">
+              <a:spcAft>
+                <a:spcPts val="0"/>
+              </a:spcAft>
+            </a:pPr>
+            <a:r>
+              <a:rPr sz="1050" b="0" i="0">
+                <a:solidFill>
+                  <a:srgbClr val="B4C7D2"/>
+                </a:solidFill>
+                <a:latin typeface="Arial"/>
+              </a:rPr>
+              <a:t>0</a:t>
+            </a:r>
+          </a:p>
+        </p:txBody>
+      </p:sp>
+      <p:cxnSp>
+        <p:nvCxnSpPr>
+          <p:cNvPr id="35" name="C1-E32 line 33" descr="sci-ppt:o033"/>
+          <p:cNvCxnSpPr/>
+          <p:nvPr/>
+        </p:nvCxnSpPr>
+        <p:spPr>
+          <a:xfrm>
+            <a:off x="6035040" y="4572000"/>
+            <a:ext cx="0" cy="64008"/>
+          </a:xfrm>
+          <a:prstGeom prst="line">
+            <a:avLst/>
+          </a:prstGeom>
+          <a:ln w="12700">
+            <a:solidFill>
+              <a:srgbClr val="B4C7D2"/>
+            </a:solidFill>
+          </a:ln>
+          <a:effectLst/>
+        </p:spPr>
+      </p:cxnSp>
+      <p:cxnSp>
+        <p:nvCxnSpPr>
+          <p:cNvPr id="36" name="C1-E32 line 34" descr="sci-ppt:o034"/>
+          <p:cNvCxnSpPr/>
+          <p:nvPr/>
+        </p:nvCxnSpPr>
+        <p:spPr>
+          <a:xfrm>
+            <a:off x="6035040" y="1554480"/>
+            <a:ext cx="0" cy="3017520"/>
+          </a:xfrm>
+          <a:prstGeom prst="line">
+            <a:avLst/>
+          </a:prstGeom>
+          <a:ln w="7620">
+            <a:solidFill>
+              <a:srgbClr val="2E4756"/>
+            </a:solidFill>
+          </a:ln>
+          <a:effectLst/>
+        </p:spPr>
+      </p:cxnSp>
+      <p:sp>
+        <p:nvSpPr>
+          <p:cNvPr id="37" name="C1-E32 text 35" descr="sci-ppt:o035"/>
+          <p:cNvSpPr txBox="1"/>
+          <p:nvPr/>
+        </p:nvSpPr>
+        <p:spPr>
+          <a:xfrm>
+            <a:off x="5577840" y="4654296"/>
+            <a:ext cx="914400" cy="208407"/>
+          </a:xfrm>
+          <a:prstGeom prst="rect">
+            <a:avLst/>
+          </a:prstGeom>
+          <a:noFill/>
+          <a:effectLst/>
+        </p:spPr>
+        <p:txBody>
+          <a:bodyPr wrap="none" lIns="18288" rIns="18288" tIns="18288" bIns="18288" anchor="t">
+            <a:spAutoFit/>
+          </a:bodyPr>
+          <a:lstStyle/>
+          <a:p>
+            <a:pPr algn="ctr">
+              <a:spcAft>
+                <a:spcPts val="0"/>
+              </a:spcAft>
+            </a:pPr>
+            <a:r>
+              <a:rPr sz="1050" b="0" i="0">
+                <a:solidFill>
+                  <a:srgbClr val="B4C7D2"/>
+                </a:solidFill>
+                <a:latin typeface="Arial"/>
+              </a:rPr>
+              <a:t>1</a:t>
+            </a:r>
+          </a:p>
+        </p:txBody>
+      </p:sp>
+      <p:cxnSp>
+        <p:nvCxnSpPr>
+          <p:cNvPr id="38" name="C1-E32 line 36" descr="sci-ppt:o036"/>
+          <p:cNvCxnSpPr/>
+          <p:nvPr/>
+        </p:nvCxnSpPr>
+        <p:spPr>
+          <a:xfrm>
+            <a:off x="7132320" y="4572000"/>
+            <a:ext cx="0" cy="64008"/>
+          </a:xfrm>
+          <a:prstGeom prst="line">
+            <a:avLst/>
+          </a:prstGeom>
+          <a:ln w="12700">
+            <a:solidFill>
+              <a:srgbClr val="B4C7D2"/>
+            </a:solidFill>
+          </a:ln>
+          <a:effectLst/>
+        </p:spPr>
+      </p:cxnSp>
+      <p:cxnSp>
+        <p:nvCxnSpPr>
+          <p:cNvPr id="39" name="C1-E32 line 37" descr="sci-ppt:o037"/>
+          <p:cNvCxnSpPr/>
+          <p:nvPr/>
+        </p:nvCxnSpPr>
+        <p:spPr>
+          <a:xfrm>
+            <a:off x="7132320" y="1554480"/>
+            <a:ext cx="0" cy="3017520"/>
+          </a:xfrm>
+          <a:prstGeom prst="line">
+            <a:avLst/>
+          </a:prstGeom>
+          <a:ln w="7620">
+            <a:solidFill>
+              <a:srgbClr val="2E4756"/>
+            </a:solidFill>
+          </a:ln>
+          <a:effectLst/>
+        </p:spPr>
+      </p:cxnSp>
+      <p:sp>
+        <p:nvSpPr>
+          <p:cNvPr id="40" name="C1-E32 text 38" descr="sci-ppt:o038"/>
+          <p:cNvSpPr txBox="1"/>
+          <p:nvPr/>
+        </p:nvSpPr>
+        <p:spPr>
+          <a:xfrm>
+            <a:off x="6675120" y="4654296"/>
+            <a:ext cx="914400" cy="208407"/>
+          </a:xfrm>
+          <a:prstGeom prst="rect">
+            <a:avLst/>
+          </a:prstGeom>
+          <a:noFill/>
+          <a:effectLst/>
+        </p:spPr>
+        <p:txBody>
+          <a:bodyPr wrap="none" lIns="18288" rIns="18288" tIns="18288" bIns="18288" anchor="t">
+            <a:spAutoFit/>
+          </a:bodyPr>
+          <a:lstStyle/>
+          <a:p>
+            <a:pPr algn="ctr">
+              <a:spcAft>
+                <a:spcPts val="0"/>
+              </a:spcAft>
+            </a:pPr>
+            <a:r>
+              <a:rPr sz="1050" b="0" i="0">
+                <a:solidFill>
+                  <a:srgbClr val="B4C7D2"/>
+                </a:solidFill>
+                <a:latin typeface="Arial"/>
+              </a:rPr>
+              <a:t>2</a:t>
+            </a:r>
+          </a:p>
+        </p:txBody>
+      </p:sp>
+      <p:cxnSp>
+        <p:nvCxnSpPr>
+          <p:cNvPr id="41" name="C1-E32 line 39" descr="sci-ppt:o039"/>
+          <p:cNvCxnSpPr/>
+          <p:nvPr/>
+        </p:nvCxnSpPr>
+        <p:spPr>
+          <a:xfrm>
+            <a:off x="8229600" y="4572000"/>
+            <a:ext cx="0" cy="64008"/>
+          </a:xfrm>
+          <a:prstGeom prst="line">
+            <a:avLst/>
+          </a:prstGeom>
+          <a:ln w="12700">
+            <a:solidFill>
+              <a:srgbClr val="B4C7D2"/>
+            </a:solidFill>
+          </a:ln>
+          <a:effectLst/>
+        </p:spPr>
+      </p:cxnSp>
+      <p:cxnSp>
+        <p:nvCxnSpPr>
+          <p:cNvPr id="42" name="C1-E32 line 40" descr="sci-ppt:o040"/>
+          <p:cNvCxnSpPr/>
+          <p:nvPr/>
+        </p:nvCxnSpPr>
+        <p:spPr>
+          <a:xfrm>
+            <a:off x="8229600" y="1554480"/>
+            <a:ext cx="0" cy="3017520"/>
+          </a:xfrm>
+          <a:prstGeom prst="line">
+            <a:avLst/>
+          </a:prstGeom>
+          <a:ln w="7620">
+            <a:solidFill>
+              <a:srgbClr val="2E4756"/>
+            </a:solidFill>
+          </a:ln>
+          <a:effectLst/>
+        </p:spPr>
+      </p:cxnSp>
+      <p:sp>
+        <p:nvSpPr>
+          <p:cNvPr id="43" name="C1-E32 text 41" descr="sci-ppt:o041"/>
+          <p:cNvSpPr txBox="1"/>
+          <p:nvPr/>
+        </p:nvSpPr>
+        <p:spPr>
+          <a:xfrm>
+            <a:off x="7772400" y="4654296"/>
+            <a:ext cx="914400" cy="208407"/>
+          </a:xfrm>
+          <a:prstGeom prst="rect">
+            <a:avLst/>
+          </a:prstGeom>
+          <a:noFill/>
+          <a:effectLst/>
+        </p:spPr>
+        <p:txBody>
+          <a:bodyPr wrap="none" lIns="18288" rIns="18288" tIns="18288" bIns="18288" anchor="t">
+            <a:spAutoFit/>
+          </a:bodyPr>
+          <a:lstStyle/>
+          <a:p>
+            <a:pPr algn="ctr">
+              <a:spcAft>
+                <a:spcPts val="0"/>
+              </a:spcAft>
+            </a:pPr>
+            <a:r>
+              <a:rPr sz="1050" b="0" i="0">
+                <a:solidFill>
+                  <a:srgbClr val="B4C7D2"/>
+                </a:solidFill>
+                <a:latin typeface="Arial"/>
+              </a:rPr>
+              <a:t>3</a:t>
+            </a:r>
+          </a:p>
+        </p:txBody>
+      </p:sp>
+      <p:cxnSp>
+        <p:nvCxnSpPr>
+          <p:cNvPr id="44" name="C1-E32 line 42" descr="sci-ppt:o042"/>
+          <p:cNvCxnSpPr/>
+          <p:nvPr/>
+        </p:nvCxnSpPr>
+        <p:spPr>
+          <a:xfrm>
+            <a:off x="4873752" y="4572000"/>
+            <a:ext cx="64008" cy="0"/>
+          </a:xfrm>
+          <a:prstGeom prst="line">
+            <a:avLst/>
+          </a:prstGeom>
+          <a:ln w="12700">
+            <a:solidFill>
+              <a:srgbClr val="B4C7D2"/>
+            </a:solidFill>
+          </a:ln>
+          <a:effectLst/>
+        </p:spPr>
+      </p:cxnSp>
+      <p:cxnSp>
+        <p:nvCxnSpPr>
+          <p:cNvPr id="45" name="C1-E32 line 43" descr="sci-ppt:o043"/>
+          <p:cNvCxnSpPr/>
+          <p:nvPr/>
+        </p:nvCxnSpPr>
+        <p:spPr>
+          <a:xfrm>
+            <a:off x="4873752" y="3598606"/>
+            <a:ext cx="64008" cy="0"/>
+          </a:xfrm>
+          <a:prstGeom prst="line">
+            <a:avLst/>
+          </a:prstGeom>
+          <a:ln w="12700">
+            <a:solidFill>
+              <a:srgbClr val="B4C7D2"/>
+            </a:solidFill>
+          </a:ln>
+          <a:effectLst/>
+        </p:spPr>
+      </p:cxnSp>
+      <p:cxnSp>
+        <p:nvCxnSpPr>
+          <p:cNvPr id="46" name="C1-E32 line 44" descr="sci-ppt:o044"/>
+          <p:cNvCxnSpPr/>
+          <p:nvPr/>
+        </p:nvCxnSpPr>
+        <p:spPr>
+          <a:xfrm>
+            <a:off x="4937760" y="3598606"/>
+            <a:ext cx="3291840" cy="0"/>
+          </a:xfrm>
+          <a:prstGeom prst="line">
+            <a:avLst/>
+          </a:prstGeom>
+          <a:ln w="7620">
+            <a:solidFill>
+              <a:srgbClr val="2E4756"/>
+            </a:solidFill>
+          </a:ln>
+          <a:effectLst/>
+        </p:spPr>
+      </p:cxnSp>
+      <p:sp>
+        <p:nvSpPr>
+          <p:cNvPr id="47" name="C1-E32 text 45" descr="sci-ppt:o045"/>
+          <p:cNvSpPr txBox="1"/>
+          <p:nvPr/>
+        </p:nvSpPr>
+        <p:spPr>
+          <a:xfrm>
+            <a:off x="4069080" y="3516310"/>
+            <a:ext cx="777240" cy="208407"/>
+          </a:xfrm>
+          <a:prstGeom prst="rect">
+            <a:avLst/>
+          </a:prstGeom>
+          <a:noFill/>
+          <a:effectLst/>
+        </p:spPr>
+        <p:txBody>
+          <a:bodyPr wrap="none" lIns="18288" rIns="18288" tIns="18288" bIns="18288" anchor="t">
+            <a:spAutoFit/>
+          </a:bodyPr>
+          <a:lstStyle/>
+          <a:p>
+            <a:pPr algn="r">
+              <a:spcAft>
+                <a:spcPts val="0"/>
+              </a:spcAft>
+            </a:pPr>
+            <a:r>
+              <a:rPr sz="1050" b="0" i="0">
+                <a:solidFill>
+                  <a:srgbClr val="B4C7D2"/>
+                </a:solidFill>
+                <a:latin typeface="Arial"/>
+              </a:rPr>
+              <a:t>10</a:t>
+            </a:r>
+          </a:p>
+        </p:txBody>
+      </p:sp>
+      <p:cxnSp>
+        <p:nvCxnSpPr>
+          <p:cNvPr id="48" name="C1-E32 line 46" descr="sci-ppt:o046"/>
+          <p:cNvCxnSpPr/>
+          <p:nvPr/>
+        </p:nvCxnSpPr>
+        <p:spPr>
+          <a:xfrm>
+            <a:off x="4873752" y="2625212"/>
+            <a:ext cx="64008" cy="0"/>
+          </a:xfrm>
+          <a:prstGeom prst="line">
+            <a:avLst/>
+          </a:prstGeom>
+          <a:ln w="12700">
+            <a:solidFill>
+              <a:srgbClr val="B4C7D2"/>
+            </a:solidFill>
+          </a:ln>
+          <a:effectLst/>
+        </p:spPr>
+      </p:cxnSp>
+      <p:cxnSp>
+        <p:nvCxnSpPr>
+          <p:cNvPr id="49" name="C1-E32 line 47" descr="sci-ppt:o047"/>
+          <p:cNvCxnSpPr/>
+          <p:nvPr/>
+        </p:nvCxnSpPr>
+        <p:spPr>
+          <a:xfrm>
+            <a:off x="4937760" y="2625212"/>
+            <a:ext cx="3291840" cy="0"/>
+          </a:xfrm>
+          <a:prstGeom prst="line">
+            <a:avLst/>
+          </a:prstGeom>
+          <a:ln w="7620">
+            <a:solidFill>
+              <a:srgbClr val="2E4756"/>
+            </a:solidFill>
+          </a:ln>
+          <a:effectLst/>
+        </p:spPr>
+      </p:cxnSp>
+      <p:sp>
+        <p:nvSpPr>
+          <p:cNvPr id="50" name="C1-E32 text 48" descr="sci-ppt:o048"/>
+          <p:cNvSpPr txBox="1"/>
+          <p:nvPr/>
+        </p:nvSpPr>
+        <p:spPr>
+          <a:xfrm>
+            <a:off x="4069080" y="2542916"/>
+            <a:ext cx="777240" cy="208407"/>
+          </a:xfrm>
+          <a:prstGeom prst="rect">
+            <a:avLst/>
+          </a:prstGeom>
+          <a:noFill/>
+          <a:effectLst/>
+        </p:spPr>
+        <p:txBody>
+          <a:bodyPr wrap="none" lIns="18288" rIns="18288" tIns="18288" bIns="18288" anchor="t">
+            <a:spAutoFit/>
+          </a:bodyPr>
+          <a:lstStyle/>
+          <a:p>
+            <a:pPr algn="r">
+              <a:spcAft>
+                <a:spcPts val="0"/>
+              </a:spcAft>
+            </a:pPr>
+            <a:r>
+              <a:rPr sz="1050" b="0" i="0">
+                <a:solidFill>
+                  <a:srgbClr val="B4C7D2"/>
+                </a:solidFill>
+                <a:latin typeface="Arial"/>
+              </a:rPr>
+              <a:t>20</a:t>
+            </a:r>
+          </a:p>
+        </p:txBody>
+      </p:sp>
+      <p:cxnSp>
+        <p:nvCxnSpPr>
+          <p:cNvPr id="51" name="C1-E32 line 49" descr="sci-ppt:o049"/>
+          <p:cNvCxnSpPr/>
+          <p:nvPr/>
+        </p:nvCxnSpPr>
+        <p:spPr>
+          <a:xfrm>
+            <a:off x="4873752" y="1651819"/>
+            <a:ext cx="64008" cy="0"/>
+          </a:xfrm>
+          <a:prstGeom prst="line">
+            <a:avLst/>
+          </a:prstGeom>
+          <a:ln w="12700">
+            <a:solidFill>
+              <a:srgbClr val="B4C7D2"/>
+            </a:solidFill>
+          </a:ln>
+          <a:effectLst/>
+        </p:spPr>
+      </p:cxnSp>
+      <p:cxnSp>
+        <p:nvCxnSpPr>
+          <p:cNvPr id="52" name="C1-E32 line 50" descr="sci-ppt:o050"/>
+          <p:cNvCxnSpPr/>
+          <p:nvPr/>
+        </p:nvCxnSpPr>
+        <p:spPr>
+          <a:xfrm>
+            <a:off x="4937760" y="1651819"/>
+            <a:ext cx="3291840" cy="0"/>
+          </a:xfrm>
+          <a:prstGeom prst="line">
+            <a:avLst/>
+          </a:prstGeom>
+          <a:ln w="7620">
+            <a:solidFill>
+              <a:srgbClr val="2E4756"/>
+            </a:solidFill>
+          </a:ln>
+          <a:effectLst/>
+        </p:spPr>
+      </p:cxnSp>
+      <p:sp>
+        <p:nvSpPr>
+          <p:cNvPr id="53" name="C1-E32 text 51" descr="sci-ppt:o051"/>
+          <p:cNvSpPr txBox="1"/>
+          <p:nvPr/>
+        </p:nvSpPr>
+        <p:spPr>
+          <a:xfrm>
+            <a:off x="4069080" y="1569523"/>
+            <a:ext cx="777240" cy="208407"/>
+          </a:xfrm>
+          <a:prstGeom prst="rect">
+            <a:avLst/>
+          </a:prstGeom>
+          <a:noFill/>
+          <a:effectLst/>
+        </p:spPr>
+        <p:txBody>
+          <a:bodyPr wrap="none" lIns="18288" rIns="18288" tIns="18288" bIns="18288" anchor="t">
+            <a:spAutoFit/>
+          </a:bodyPr>
+          <a:lstStyle/>
+          <a:p>
+            <a:pPr algn="r">
+              <a:spcAft>
+                <a:spcPts val="0"/>
+              </a:spcAft>
+            </a:pPr>
+            <a:r>
+              <a:rPr sz="1050" b="0" i="0">
+                <a:solidFill>
+                  <a:srgbClr val="B4C7D2"/>
+                </a:solidFill>
+                <a:latin typeface="Arial"/>
+              </a:rPr>
+              <a:t>30</a:t>
+            </a:r>
+          </a:p>
+        </p:txBody>
+      </p:sp>
+      <p:sp>
+        <p:nvSpPr>
+          <p:cNvPr id="54" name="C1-E32 text 52" descr="sci-ppt:o052"/>
+          <p:cNvSpPr txBox="1"/>
+          <p:nvPr/>
+        </p:nvSpPr>
+        <p:spPr>
+          <a:xfrm>
+            <a:off x="4937760" y="4855464"/>
+            <a:ext cx="3291840" cy="231648"/>
+          </a:xfrm>
+          <a:prstGeom prst="rect">
+            <a:avLst/>
+          </a:prstGeom>
+          <a:noFill/>
+          <a:effectLst/>
+        </p:spPr>
+        <p:txBody>
+          <a:bodyPr wrap="none" lIns="18288" rIns="18288" tIns="18288" bIns="18288" anchor="t">
+            <a:spAutoFit/>
+          </a:bodyPr>
+          <a:lstStyle/>
+          <a:p>
+            <a:pPr algn="ctr">
+              <a:spcAft>
+                <a:spcPts val="0"/>
+              </a:spcAft>
+            </a:pPr>
+            <a:r>
+              <a:rPr sz="1200" b="0" i="0">
+                <a:solidFill>
+                  <a:srgbClr val="E7F0F3"/>
+                </a:solidFill>
+                <a:latin typeface="Arial"/>
+              </a:rPr>
+              <a:t>t (µs)</a:t>
+            </a:r>
+          </a:p>
+        </p:txBody>
+      </p:sp>
+      <p:sp>
+        <p:nvSpPr>
+          <p:cNvPr id="55" name="C1-E32 text 53" descr="sci-ppt:o053"/>
+          <p:cNvSpPr txBox="1"/>
+          <p:nvPr/>
+        </p:nvSpPr>
+        <p:spPr>
+          <a:xfrm>
+            <a:off x="4389120" y="1207007"/>
+            <a:ext cx="3291840" cy="231648"/>
+          </a:xfrm>
+          <a:prstGeom prst="rect">
+            <a:avLst/>
+          </a:prstGeom>
+          <a:noFill/>
+          <a:effectLst/>
+        </p:spPr>
+        <p:txBody>
+          <a:bodyPr wrap="none" lIns="18288" rIns="18288" tIns="18288" bIns="18288" anchor="t">
+            <a:spAutoFit/>
+          </a:bodyPr>
+          <a:lstStyle/>
+          <a:p>
+            <a:pPr algn="l">
+              <a:spcAft>
+                <a:spcPts val="0"/>
+              </a:spcAft>
+            </a:pPr>
+            <a:r>
+              <a:rPr sz="1200" b="0" i="0">
+                <a:solidFill>
+                  <a:srgbClr val="E7F0F3"/>
+                </a:solidFill>
+                <a:latin typeface="Arial"/>
+              </a:rPr>
+              <a:t>R (µm)</a:t>
+            </a:r>
+          </a:p>
+        </p:txBody>
+      </p:sp>
+      <p:sp>
+        <p:nvSpPr>
+          <p:cNvPr id="56" name="C1-E32 polygon 54" descr="sci-ppt:o054"/>
+          <p:cNvSpPr/>
+          <p:nvPr/>
+        </p:nvSpPr>
+        <p:spPr>
+          <a:xfrm>
+            <a:off x="4937760" y="1651819"/>
+            <a:ext cx="3010984" cy="2919596"/>
+          </a:xfrm>
+          <a:custGeom>
+            <a:avLst/>
+            <a:gdLst/>
+            <a:ahLst/>
+            <a:cxnLst/>
+            <a:rect l="l" t="t" r="r" b="b"/>
+            <a:pathLst>
+              <a:path w="3010984" h="2919596">
+                <a:moveTo>
+                  <a:pt x="0" y="0"/>
+                </a:moveTo>
+                <a:lnTo>
+                  <a:pt x="31083" y="130"/>
+                </a:lnTo>
+                <a:lnTo>
+                  <a:pt x="62165" y="521"/>
+                </a:lnTo>
+                <a:lnTo>
+                  <a:pt x="93240" y="1172"/>
+                </a:lnTo>
+                <a:lnTo>
+                  <a:pt x="124308" y="2083"/>
+                </a:lnTo>
+                <a:lnTo>
+                  <a:pt x="155364" y="3255"/>
+                </a:lnTo>
+                <a:lnTo>
+                  <a:pt x="186406" y="4687"/>
+                </a:lnTo>
+                <a:lnTo>
+                  <a:pt x="217432" y="6379"/>
+                </a:lnTo>
+                <a:lnTo>
+                  <a:pt x="248439" y="8332"/>
+                </a:lnTo>
+                <a:lnTo>
+                  <a:pt x="279423" y="10546"/>
+                </a:lnTo>
+                <a:lnTo>
+                  <a:pt x="310382" y="13019"/>
+                </a:lnTo>
+                <a:lnTo>
+                  <a:pt x="341313" y="15753"/>
+                </a:lnTo>
+                <a:lnTo>
+                  <a:pt x="372214" y="18748"/>
+                </a:lnTo>
+                <a:lnTo>
+                  <a:pt x="403082" y="22003"/>
+                </a:lnTo>
+                <a:lnTo>
+                  <a:pt x="433913" y="25518"/>
+                </a:lnTo>
+                <a:lnTo>
+                  <a:pt x="464706" y="29293"/>
+                </a:lnTo>
+                <a:lnTo>
+                  <a:pt x="495456" y="33329"/>
+                </a:lnTo>
+                <a:lnTo>
+                  <a:pt x="526163" y="37626"/>
+                </a:lnTo>
+                <a:lnTo>
+                  <a:pt x="556822" y="42183"/>
+                </a:lnTo>
+                <a:lnTo>
+                  <a:pt x="587430" y="47000"/>
+                </a:lnTo>
+                <a:lnTo>
+                  <a:pt x="617986" y="52077"/>
+                </a:lnTo>
+                <a:lnTo>
+                  <a:pt x="648486" y="57415"/>
+                </a:lnTo>
+                <a:lnTo>
+                  <a:pt x="678928" y="63013"/>
+                </a:lnTo>
+                <a:lnTo>
+                  <a:pt x="709308" y="68872"/>
+                </a:lnTo>
+                <a:lnTo>
+                  <a:pt x="739624" y="74991"/>
+                </a:lnTo>
+                <a:lnTo>
+                  <a:pt x="769873" y="81371"/>
+                </a:lnTo>
+                <a:lnTo>
+                  <a:pt x="800051" y="88011"/>
+                </a:lnTo>
+                <a:lnTo>
+                  <a:pt x="830158" y="94911"/>
+                </a:lnTo>
+                <a:lnTo>
+                  <a:pt x="860188" y="102072"/>
+                </a:lnTo>
+                <a:lnTo>
+                  <a:pt x="890140" y="109493"/>
+                </a:lnTo>
+                <a:lnTo>
+                  <a:pt x="920010" y="117174"/>
+                </a:lnTo>
+                <a:lnTo>
+                  <a:pt x="949796" y="125116"/>
+                </a:lnTo>
+                <a:lnTo>
+                  <a:pt x="979496" y="133318"/>
+                </a:lnTo>
+                <a:lnTo>
+                  <a:pt x="1009105" y="141781"/>
+                </a:lnTo>
+                <a:lnTo>
+                  <a:pt x="1038621" y="150504"/>
+                </a:lnTo>
+                <a:lnTo>
+                  <a:pt x="1068041" y="159487"/>
+                </a:lnTo>
+                <a:lnTo>
+                  <a:pt x="1097362" y="168731"/>
+                </a:lnTo>
+                <a:lnTo>
+                  <a:pt x="1126582" y="178235"/>
+                </a:lnTo>
+                <a:lnTo>
+                  <a:pt x="1155697" y="187999"/>
+                </a:lnTo>
+                <a:lnTo>
+                  <a:pt x="1184705" y="198024"/>
+                </a:lnTo>
+                <a:lnTo>
+                  <a:pt x="1213602" y="208309"/>
+                </a:lnTo>
+                <a:lnTo>
+                  <a:pt x="1242385" y="218855"/>
+                </a:lnTo>
+                <a:lnTo>
+                  <a:pt x="1271052" y="229661"/>
+                </a:lnTo>
+                <a:lnTo>
+                  <a:pt x="1299600" y="240728"/>
+                </a:lnTo>
+                <a:lnTo>
+                  <a:pt x="1328025" y="252054"/>
+                </a:lnTo>
+                <a:lnTo>
+                  <a:pt x="1356325" y="263642"/>
+                </a:lnTo>
+                <a:lnTo>
+                  <a:pt x="1384496" y="275489"/>
+                </a:lnTo>
+                <a:lnTo>
+                  <a:pt x="1412535" y="287597"/>
+                </a:lnTo>
+                <a:lnTo>
+                  <a:pt x="1440441" y="299966"/>
+                </a:lnTo>
+                <a:lnTo>
+                  <a:pt x="1468208" y="312594"/>
+                </a:lnTo>
+                <a:lnTo>
+                  <a:pt x="1495835" y="325484"/>
+                </a:lnTo>
+                <a:lnTo>
+                  <a:pt x="1523318" y="338633"/>
+                </a:lnTo>
+                <a:lnTo>
+                  <a:pt x="1550655" y="352043"/>
+                </a:lnTo>
+                <a:lnTo>
+                  <a:pt x="1577842" y="365713"/>
+                </a:lnTo>
+                <a:lnTo>
+                  <a:pt x="1604875" y="379644"/>
+                </a:lnTo>
+                <a:lnTo>
+                  <a:pt x="1631753" y="393835"/>
+                </a:lnTo>
+                <a:lnTo>
+                  <a:pt x="1658471" y="408287"/>
+                </a:lnTo>
+                <a:lnTo>
+                  <a:pt x="1685027" y="422998"/>
+                </a:lnTo>
+                <a:lnTo>
+                  <a:pt x="1711417" y="437971"/>
+                </a:lnTo>
+                <a:lnTo>
+                  <a:pt x="1737639" y="453203"/>
+                </a:lnTo>
+                <a:lnTo>
+                  <a:pt x="1763689" y="468696"/>
+                </a:lnTo>
+                <a:lnTo>
+                  <a:pt x="1789564" y="484450"/>
+                </a:lnTo>
+                <a:lnTo>
+                  <a:pt x="1815260" y="500464"/>
+                </a:lnTo>
+                <a:lnTo>
+                  <a:pt x="1840775" y="516738"/>
+                </a:lnTo>
+                <a:lnTo>
+                  <a:pt x="1866106" y="533272"/>
+                </a:lnTo>
+                <a:lnTo>
+                  <a:pt x="1891248" y="550067"/>
+                </a:lnTo>
+                <a:lnTo>
+                  <a:pt x="1916199" y="567123"/>
+                </a:lnTo>
+                <a:lnTo>
+                  <a:pt x="1940956" y="584438"/>
+                </a:lnTo>
+                <a:lnTo>
+                  <a:pt x="1965515" y="602014"/>
+                </a:lnTo>
+                <a:lnTo>
+                  <a:pt x="1989873" y="619851"/>
+                </a:lnTo>
+                <a:lnTo>
+                  <a:pt x="2014026" y="637948"/>
+                </a:lnTo>
+                <a:lnTo>
+                  <a:pt x="2037972" y="656305"/>
+                </a:lnTo>
+                <a:lnTo>
+                  <a:pt x="2061706" y="674923"/>
+                </a:lnTo>
+                <a:lnTo>
+                  <a:pt x="2085227" y="693801"/>
+                </a:lnTo>
+                <a:lnTo>
+                  <a:pt x="2108529" y="712939"/>
+                </a:lnTo>
+                <a:lnTo>
+                  <a:pt x="2131611" y="732338"/>
+                </a:lnTo>
+                <a:lnTo>
+                  <a:pt x="2154468" y="751997"/>
+                </a:lnTo>
+                <a:lnTo>
+                  <a:pt x="2177097" y="771917"/>
+                </a:lnTo>
+                <a:lnTo>
+                  <a:pt x="2199495" y="792097"/>
+                </a:lnTo>
+                <a:lnTo>
+                  <a:pt x="2221658" y="812537"/>
+                </a:lnTo>
+                <a:lnTo>
+                  <a:pt x="2243583" y="833238"/>
+                </a:lnTo>
+                <a:lnTo>
+                  <a:pt x="2265266" y="854199"/>
+                </a:lnTo>
+                <a:lnTo>
+                  <a:pt x="2286704" y="875421"/>
+                </a:lnTo>
+                <a:lnTo>
+                  <a:pt x="2307894" y="896903"/>
+                </a:lnTo>
+                <a:lnTo>
+                  <a:pt x="2328832" y="918645"/>
+                </a:lnTo>
+                <a:lnTo>
+                  <a:pt x="2349515" y="940648"/>
+                </a:lnTo>
+                <a:lnTo>
+                  <a:pt x="2369938" y="962911"/>
+                </a:lnTo>
+                <a:lnTo>
+                  <a:pt x="2390100" y="985434"/>
+                </a:lnTo>
+                <a:lnTo>
+                  <a:pt x="2409995" y="1008218"/>
+                </a:lnTo>
+                <a:lnTo>
+                  <a:pt x="2429622" y="1031262"/>
+                </a:lnTo>
+                <a:lnTo>
+                  <a:pt x="2448975" y="1054567"/>
+                </a:lnTo>
+                <a:lnTo>
+                  <a:pt x="2468052" y="1078132"/>
+                </a:lnTo>
+                <a:lnTo>
+                  <a:pt x="2486850" y="1101957"/>
+                </a:lnTo>
+                <a:lnTo>
+                  <a:pt x="2505364" y="1126043"/>
+                </a:lnTo>
+                <a:lnTo>
+                  <a:pt x="2523591" y="1150389"/>
+                </a:lnTo>
+                <a:lnTo>
+                  <a:pt x="2541528" y="1174996"/>
+                </a:lnTo>
+                <a:lnTo>
+                  <a:pt x="2559172" y="1199863"/>
+                </a:lnTo>
+                <a:lnTo>
+                  <a:pt x="2576519" y="1224990"/>
+                </a:lnTo>
+                <a:lnTo>
+                  <a:pt x="2593565" y="1250378"/>
+                </a:lnTo>
+                <a:lnTo>
+                  <a:pt x="2610307" y="1276026"/>
+                </a:lnTo>
+                <a:lnTo>
+                  <a:pt x="2626741" y="1301935"/>
+                </a:lnTo>
+                <a:lnTo>
+                  <a:pt x="2642866" y="1328103"/>
+                </a:lnTo>
+                <a:lnTo>
+                  <a:pt x="2658675" y="1354533"/>
+                </a:lnTo>
+                <a:lnTo>
+                  <a:pt x="2674168" y="1381222"/>
+                </a:lnTo>
+                <a:lnTo>
+                  <a:pt x="2689340" y="1408172"/>
+                </a:lnTo>
+                <a:lnTo>
+                  <a:pt x="2704188" y="1435383"/>
+                </a:lnTo>
+                <a:lnTo>
+                  <a:pt x="2718709" y="1462854"/>
+                </a:lnTo>
+                <a:lnTo>
+                  <a:pt x="2732899" y="1490585"/>
+                </a:lnTo>
+                <a:lnTo>
+                  <a:pt x="2746757" y="1518576"/>
+                </a:lnTo>
+                <a:lnTo>
+                  <a:pt x="2760277" y="1546828"/>
+                </a:lnTo>
+                <a:lnTo>
+                  <a:pt x="2773458" y="1575341"/>
+                </a:lnTo>
+                <a:lnTo>
+                  <a:pt x="2786297" y="1604114"/>
+                </a:lnTo>
+                <a:lnTo>
+                  <a:pt x="2798791" y="1633147"/>
+                </a:lnTo>
+                <a:lnTo>
+                  <a:pt x="2810937" y="1662440"/>
+                </a:lnTo>
+                <a:lnTo>
+                  <a:pt x="2822732" y="1691994"/>
+                </a:lnTo>
+                <a:lnTo>
+                  <a:pt x="2834174" y="1721808"/>
+                </a:lnTo>
+                <a:lnTo>
+                  <a:pt x="2845260" y="1751883"/>
+                </a:lnTo>
+                <a:lnTo>
+                  <a:pt x="2855989" y="1782218"/>
+                </a:lnTo>
+                <a:lnTo>
+                  <a:pt x="2866357" y="1812814"/>
+                </a:lnTo>
+                <a:lnTo>
+                  <a:pt x="2876363" y="1843670"/>
+                </a:lnTo>
+                <a:lnTo>
+                  <a:pt x="2886006" y="1874786"/>
+                </a:lnTo>
+                <a:lnTo>
+                  <a:pt x="2895282" y="1906162"/>
+                </a:lnTo>
+                <a:lnTo>
+                  <a:pt x="2904192" y="1937799"/>
+                </a:lnTo>
+                <a:lnTo>
+                  <a:pt x="2912733" y="1969697"/>
+                </a:lnTo>
+                <a:lnTo>
+                  <a:pt x="2920904" y="2001855"/>
+                </a:lnTo>
+                <a:lnTo>
+                  <a:pt x="2928706" y="2034273"/>
+                </a:lnTo>
+                <a:lnTo>
+                  <a:pt x="2936136" y="2066951"/>
+                </a:lnTo>
+                <a:lnTo>
+                  <a:pt x="2943195" y="2099890"/>
+                </a:lnTo>
+                <a:lnTo>
+                  <a:pt x="2949884" y="2133090"/>
+                </a:lnTo>
+                <a:lnTo>
+                  <a:pt x="2956202" y="2166549"/>
+                </a:lnTo>
+                <a:lnTo>
+                  <a:pt x="2962150" y="2200269"/>
+                </a:lnTo>
+                <a:lnTo>
+                  <a:pt x="2967730" y="2234250"/>
+                </a:lnTo>
+                <a:lnTo>
+                  <a:pt x="2972944" y="2268491"/>
+                </a:lnTo>
+                <a:lnTo>
+                  <a:pt x="2977793" y="2302992"/>
+                </a:lnTo>
+                <a:lnTo>
+                  <a:pt x="2982281" y="2337754"/>
+                </a:lnTo>
+                <a:lnTo>
+                  <a:pt x="2986410" y="2372776"/>
+                </a:lnTo>
+                <a:lnTo>
+                  <a:pt x="2990186" y="2408058"/>
+                </a:lnTo>
+                <a:lnTo>
+                  <a:pt x="2993613" y="2443601"/>
+                </a:lnTo>
+                <a:lnTo>
+                  <a:pt x="2996697" y="2479404"/>
+                </a:lnTo>
+                <a:lnTo>
+                  <a:pt x="2999444" y="2515468"/>
+                </a:lnTo>
+                <a:lnTo>
+                  <a:pt x="3001863" y="2551792"/>
+                </a:lnTo>
+                <a:lnTo>
+                  <a:pt x="3003962" y="2588376"/>
+                </a:lnTo>
+                <a:lnTo>
+                  <a:pt x="3005752" y="2625221"/>
+                </a:lnTo>
+                <a:lnTo>
+                  <a:pt x="3007246" y="2662326"/>
+                </a:lnTo>
+                <a:lnTo>
+                  <a:pt x="3008456" y="2699692"/>
+                </a:lnTo>
+                <a:lnTo>
+                  <a:pt x="3009400" y="2737318"/>
+                </a:lnTo>
+                <a:lnTo>
+                  <a:pt x="3010097" y="2775204"/>
+                </a:lnTo>
+                <a:lnTo>
+                  <a:pt x="3010570" y="2813350"/>
+                </a:lnTo>
+                <a:lnTo>
+                  <a:pt x="3010848" y="2851758"/>
+                </a:lnTo>
+                <a:lnTo>
+                  <a:pt x="3010967" y="2890425"/>
+                </a:lnTo>
+                <a:lnTo>
+                  <a:pt x="3010984" y="2919596"/>
+                </a:lnTo>
+              </a:path>
+            </a:pathLst>
+          </a:custGeom>
+          <a:noFill/>
+          <a:ln w="38100">
+            <a:solidFill>
+              <a:srgbClr val="F2B880"/>
+            </a:solidFill>
+          </a:ln>
+          <a:effectLst/>
+        </p:spPr>
+        <p:txBody>
+          <a:bodyPr rtlCol="0" anchor="ctr"/>
+          <a:lstStyle/>
+          <a:p>
+            <a:pPr algn="ctr"/>
+          </a:p>
+        </p:txBody>
+      </p:sp>
+      <p:cxnSp>
+        <p:nvCxnSpPr>
+          <p:cNvPr id="57" name="C1-E32 line 55" descr="sci-ppt:o055"/>
+          <p:cNvCxnSpPr/>
+          <p:nvPr/>
+        </p:nvCxnSpPr>
+        <p:spPr>
+          <a:xfrm>
+            <a:off x="7948744" y="1554480"/>
+            <a:ext cx="0" cy="3017520"/>
+          </a:xfrm>
+          <a:prstGeom prst="line">
+            <a:avLst/>
+          </a:prstGeom>
+          <a:ln w="16510">
+            <a:solidFill>
+              <a:srgbClr val="F28BA0"/>
+            </a:solidFill>
+            <a:prstDash val="dash"/>
+          </a:ln>
+          <a:effectLst/>
+        </p:spPr>
+      </p:cxnSp>
+      <p:cxnSp>
+        <p:nvCxnSpPr>
+          <p:cNvPr id="58" name="C1-E32 line 56" descr="sci-ppt:o056"/>
+          <p:cNvCxnSpPr/>
+          <p:nvPr/>
+        </p:nvCxnSpPr>
+        <p:spPr>
+          <a:xfrm>
+            <a:off x="8961120" y="4572000"/>
+            <a:ext cx="2834640" cy="0"/>
+          </a:xfrm>
+          <a:prstGeom prst="line">
+            <a:avLst/>
+          </a:prstGeom>
+          <a:ln w="19050">
+            <a:solidFill>
+              <a:srgbClr val="B4C7D2"/>
+            </a:solidFill>
+          </a:ln>
+          <a:effectLst/>
+        </p:spPr>
+      </p:cxnSp>
+      <p:cxnSp>
+        <p:nvCxnSpPr>
+          <p:cNvPr id="59" name="C1-E32 line 57" descr="sci-ppt:o057"/>
+          <p:cNvCxnSpPr/>
+          <p:nvPr/>
+        </p:nvCxnSpPr>
+        <p:spPr>
+          <a:xfrm>
+            <a:off x="8961120" y="1554480"/>
+            <a:ext cx="0" cy="3017520"/>
+          </a:xfrm>
+          <a:prstGeom prst="line">
+            <a:avLst/>
+          </a:prstGeom>
+          <a:ln w="19050">
+            <a:solidFill>
+              <a:srgbClr val="B4C7D2"/>
+            </a:solidFill>
+          </a:ln>
+          <a:effectLst/>
+        </p:spPr>
+      </p:cxnSp>
+      <p:cxnSp>
+        <p:nvCxnSpPr>
+          <p:cNvPr id="60" name="C1-E32 line 58" descr="sci-ppt:o058"/>
+          <p:cNvCxnSpPr/>
+          <p:nvPr/>
+        </p:nvCxnSpPr>
+        <p:spPr>
+          <a:xfrm>
+            <a:off x="8961120" y="4572000"/>
+            <a:ext cx="0" cy="64008"/>
+          </a:xfrm>
+          <a:prstGeom prst="line">
+            <a:avLst/>
+          </a:prstGeom>
+          <a:ln w="12700">
+            <a:solidFill>
+              <a:srgbClr val="B4C7D2"/>
+            </a:solidFill>
+          </a:ln>
+          <a:effectLst/>
+        </p:spPr>
+      </p:cxnSp>
+      <p:cxnSp>
+        <p:nvCxnSpPr>
+          <p:cNvPr id="61" name="C1-E32 line 59" descr="sci-ppt:o059"/>
+          <p:cNvCxnSpPr/>
+          <p:nvPr/>
+        </p:nvCxnSpPr>
+        <p:spPr>
+          <a:xfrm>
+            <a:off x="8961120" y="1554480"/>
+            <a:ext cx="0" cy="3017520"/>
+          </a:xfrm>
+          <a:prstGeom prst="line">
+            <a:avLst/>
+          </a:prstGeom>
+          <a:ln w="7620">
+            <a:solidFill>
+              <a:srgbClr val="2E4756"/>
+            </a:solidFill>
+          </a:ln>
+          <a:effectLst/>
+        </p:spPr>
+      </p:cxnSp>
+      <p:sp>
+        <p:nvSpPr>
+          <p:cNvPr id="62" name="C1-E32 text 60" descr="sci-ppt:o060"/>
+          <p:cNvSpPr txBox="1"/>
+          <p:nvPr/>
+        </p:nvSpPr>
+        <p:spPr>
+          <a:xfrm>
+            <a:off x="8503920" y="4654296"/>
+            <a:ext cx="914400" cy="208407"/>
+          </a:xfrm>
+          <a:prstGeom prst="rect">
+            <a:avLst/>
+          </a:prstGeom>
+          <a:noFill/>
+          <a:effectLst/>
+        </p:spPr>
+        <p:txBody>
+          <a:bodyPr wrap="none" lIns="18288" rIns="18288" tIns="18288" bIns="18288" anchor="t">
+            <a:spAutoFit/>
+          </a:bodyPr>
+          <a:lstStyle/>
+          <a:p>
+            <a:pPr algn="ctr">
+              <a:spcAft>
+                <a:spcPts val="0"/>
+              </a:spcAft>
+            </a:pPr>
+            <a:r>
+              <a:rPr sz="1050" b="0" i="0">
+                <a:solidFill>
+                  <a:srgbClr val="B4C7D2"/>
+                </a:solidFill>
+                <a:latin typeface="Arial"/>
+              </a:rPr>
+              <a:t>0</a:t>
+            </a:r>
+          </a:p>
+        </p:txBody>
+      </p:sp>
+      <p:cxnSp>
+        <p:nvCxnSpPr>
+          <p:cNvPr id="63" name="C1-E32 line 61" descr="sci-ppt:o061"/>
+          <p:cNvCxnSpPr/>
+          <p:nvPr/>
+        </p:nvCxnSpPr>
+        <p:spPr>
+          <a:xfrm>
+            <a:off x="10378440" y="4572000"/>
+            <a:ext cx="0" cy="64008"/>
+          </a:xfrm>
+          <a:prstGeom prst="line">
+            <a:avLst/>
+          </a:prstGeom>
+          <a:ln w="12700">
+            <a:solidFill>
+              <a:srgbClr val="B4C7D2"/>
+            </a:solidFill>
+          </a:ln>
+          <a:effectLst/>
+        </p:spPr>
+      </p:cxnSp>
+      <p:cxnSp>
+        <p:nvCxnSpPr>
+          <p:cNvPr id="64" name="C1-E32 line 62" descr="sci-ppt:o062"/>
+          <p:cNvCxnSpPr/>
+          <p:nvPr/>
+        </p:nvCxnSpPr>
+        <p:spPr>
+          <a:xfrm>
+            <a:off x="10378440" y="1554480"/>
+            <a:ext cx="0" cy="3017520"/>
+          </a:xfrm>
+          <a:prstGeom prst="line">
+            <a:avLst/>
+          </a:prstGeom>
+          <a:ln w="7620">
+            <a:solidFill>
+              <a:srgbClr val="2E4756"/>
+            </a:solidFill>
+          </a:ln>
+          <a:effectLst/>
+        </p:spPr>
+      </p:cxnSp>
+      <p:sp>
+        <p:nvSpPr>
+          <p:cNvPr id="65" name="C1-E32 text 63" descr="sci-ppt:o063"/>
+          <p:cNvSpPr txBox="1"/>
+          <p:nvPr/>
+        </p:nvSpPr>
+        <p:spPr>
+          <a:xfrm>
+            <a:off x="9921240" y="4654296"/>
+            <a:ext cx="914400" cy="208407"/>
+          </a:xfrm>
+          <a:prstGeom prst="rect">
+            <a:avLst/>
+          </a:prstGeom>
+          <a:noFill/>
+          <a:effectLst/>
+        </p:spPr>
+        <p:txBody>
+          <a:bodyPr wrap="none" lIns="18288" rIns="18288" tIns="18288" bIns="18288" anchor="t">
+            <a:spAutoFit/>
+          </a:bodyPr>
+          <a:lstStyle/>
+          <a:p>
+            <a:pPr algn="ctr">
+              <a:spcAft>
+                <a:spcPts val="0"/>
+              </a:spcAft>
+            </a:pPr>
+            <a:r>
+              <a:rPr sz="1050" b="0" i="0">
+                <a:solidFill>
+                  <a:srgbClr val="B4C7D2"/>
+                </a:solidFill>
+                <a:latin typeface="Arial"/>
+              </a:rPr>
+              <a:t>0.5</a:t>
+            </a:r>
+          </a:p>
+        </p:txBody>
+      </p:sp>
+      <p:cxnSp>
+        <p:nvCxnSpPr>
+          <p:cNvPr id="66" name="C1-E32 line 64" descr="sci-ppt:o064"/>
+          <p:cNvCxnSpPr/>
+          <p:nvPr/>
+        </p:nvCxnSpPr>
+        <p:spPr>
+          <a:xfrm>
+            <a:off x="11795760" y="4572000"/>
+            <a:ext cx="0" cy="64008"/>
+          </a:xfrm>
+          <a:prstGeom prst="line">
+            <a:avLst/>
+          </a:prstGeom>
+          <a:ln w="12700">
+            <a:solidFill>
+              <a:srgbClr val="B4C7D2"/>
+            </a:solidFill>
+          </a:ln>
+          <a:effectLst/>
+        </p:spPr>
+      </p:cxnSp>
+      <p:cxnSp>
+        <p:nvCxnSpPr>
+          <p:cNvPr id="67" name="C1-E32 line 65" descr="sci-ppt:o065"/>
+          <p:cNvCxnSpPr/>
+          <p:nvPr/>
+        </p:nvCxnSpPr>
+        <p:spPr>
+          <a:xfrm>
+            <a:off x="11795760" y="1554480"/>
+            <a:ext cx="0" cy="3017520"/>
+          </a:xfrm>
+          <a:prstGeom prst="line">
+            <a:avLst/>
+          </a:prstGeom>
+          <a:ln w="7620">
+            <a:solidFill>
+              <a:srgbClr val="2E4756"/>
+            </a:solidFill>
+          </a:ln>
+          <a:effectLst/>
+        </p:spPr>
+      </p:cxnSp>
+      <p:sp>
+        <p:nvSpPr>
+          <p:cNvPr id="68" name="C1-E32 text 66" descr="sci-ppt:o066"/>
+          <p:cNvSpPr txBox="1"/>
+          <p:nvPr/>
+        </p:nvSpPr>
+        <p:spPr>
+          <a:xfrm>
+            <a:off x="11338560" y="4654296"/>
+            <a:ext cx="914400" cy="208407"/>
+          </a:xfrm>
+          <a:prstGeom prst="rect">
+            <a:avLst/>
+          </a:prstGeom>
+          <a:noFill/>
+          <a:effectLst/>
+        </p:spPr>
+        <p:txBody>
+          <a:bodyPr wrap="none" lIns="18288" rIns="18288" tIns="18288" bIns="18288" anchor="t">
+            <a:spAutoFit/>
+          </a:bodyPr>
+          <a:lstStyle/>
+          <a:p>
+            <a:pPr algn="ctr">
+              <a:spcAft>
+                <a:spcPts val="0"/>
+              </a:spcAft>
+            </a:pPr>
+            <a:r>
+              <a:rPr sz="1050" b="0" i="0">
+                <a:solidFill>
+                  <a:srgbClr val="B4C7D2"/>
+                </a:solidFill>
+                <a:latin typeface="Arial"/>
+              </a:rPr>
+              <a:t>1</a:t>
+            </a:r>
+          </a:p>
+        </p:txBody>
+      </p:sp>
+      <p:cxnSp>
+        <p:nvCxnSpPr>
+          <p:cNvPr id="69" name="C1-E32 line 67" descr="sci-ppt:o067"/>
+          <p:cNvCxnSpPr/>
+          <p:nvPr/>
+        </p:nvCxnSpPr>
+        <p:spPr>
+          <a:xfrm>
+            <a:off x="8897112" y="4572000"/>
+            <a:ext cx="64008" cy="0"/>
+          </a:xfrm>
+          <a:prstGeom prst="line">
+            <a:avLst/>
+          </a:prstGeom>
+          <a:ln w="12700">
+            <a:solidFill>
+              <a:srgbClr val="B4C7D2"/>
+            </a:solidFill>
+          </a:ln>
+          <a:effectLst/>
+        </p:spPr>
+      </p:cxnSp>
+      <p:cxnSp>
+        <p:nvCxnSpPr>
+          <p:cNvPr id="70" name="C1-E32 line 68" descr="sci-ppt:o068"/>
+          <p:cNvCxnSpPr/>
+          <p:nvPr/>
+        </p:nvCxnSpPr>
+        <p:spPr>
+          <a:xfrm>
+            <a:off x="8897112" y="3135085"/>
+            <a:ext cx="64008" cy="0"/>
+          </a:xfrm>
+          <a:prstGeom prst="line">
+            <a:avLst/>
+          </a:prstGeom>
+          <a:ln w="12700">
+            <a:solidFill>
+              <a:srgbClr val="B4C7D2"/>
+            </a:solidFill>
+          </a:ln>
+          <a:effectLst/>
+        </p:spPr>
+      </p:cxnSp>
+      <p:cxnSp>
+        <p:nvCxnSpPr>
+          <p:cNvPr id="71" name="C1-E32 line 69" descr="sci-ppt:o069"/>
+          <p:cNvCxnSpPr/>
+          <p:nvPr/>
+        </p:nvCxnSpPr>
+        <p:spPr>
+          <a:xfrm>
+            <a:off x="8961120" y="3135085"/>
+            <a:ext cx="2834640" cy="0"/>
+          </a:xfrm>
+          <a:prstGeom prst="line">
+            <a:avLst/>
+          </a:prstGeom>
+          <a:ln w="7620">
+            <a:solidFill>
+              <a:srgbClr val="2E4756"/>
+            </a:solidFill>
+          </a:ln>
+          <a:effectLst/>
+        </p:spPr>
+      </p:cxnSp>
+      <p:sp>
+        <p:nvSpPr>
+          <p:cNvPr id="72" name="C1-E32 text 70" descr="sci-ppt:o070"/>
+          <p:cNvSpPr txBox="1"/>
+          <p:nvPr/>
+        </p:nvSpPr>
+        <p:spPr>
+          <a:xfrm>
+            <a:off x="8092440" y="3052789"/>
+            <a:ext cx="777240" cy="208407"/>
+          </a:xfrm>
+          <a:prstGeom prst="rect">
+            <a:avLst/>
+          </a:prstGeom>
+          <a:noFill/>
+          <a:effectLst/>
+        </p:spPr>
+        <p:txBody>
+          <a:bodyPr wrap="none" lIns="18288" rIns="18288" tIns="18288" bIns="18288" anchor="t">
+            <a:spAutoFit/>
+          </a:bodyPr>
+          <a:lstStyle/>
+          <a:p>
+            <a:pPr algn="r">
+              <a:spcAft>
+                <a:spcPts val="0"/>
+              </a:spcAft>
+            </a:pPr>
+            <a:r>
+              <a:rPr sz="1050" b="0" i="0">
+                <a:solidFill>
+                  <a:srgbClr val="B4C7D2"/>
+                </a:solidFill>
+                <a:latin typeface="Arial"/>
+              </a:rPr>
+              <a:t>0.5</a:t>
+            </a:r>
+          </a:p>
+        </p:txBody>
+      </p:sp>
+      <p:cxnSp>
+        <p:nvCxnSpPr>
+          <p:cNvPr id="73" name="C1-E32 line 71" descr="sci-ppt:o071"/>
+          <p:cNvCxnSpPr/>
+          <p:nvPr/>
+        </p:nvCxnSpPr>
+        <p:spPr>
+          <a:xfrm>
+            <a:off x="8897112" y="1698171"/>
+            <a:ext cx="64008" cy="0"/>
+          </a:xfrm>
+          <a:prstGeom prst="line">
+            <a:avLst/>
+          </a:prstGeom>
+          <a:ln w="12700">
+            <a:solidFill>
+              <a:srgbClr val="B4C7D2"/>
+            </a:solidFill>
+          </a:ln>
+          <a:effectLst/>
+        </p:spPr>
+      </p:cxnSp>
+      <p:cxnSp>
+        <p:nvCxnSpPr>
+          <p:cNvPr id="74" name="C1-E32 line 72" descr="sci-ppt:o072"/>
+          <p:cNvCxnSpPr/>
+          <p:nvPr/>
+        </p:nvCxnSpPr>
+        <p:spPr>
+          <a:xfrm>
+            <a:off x="8961120" y="1698171"/>
+            <a:ext cx="2834640" cy="0"/>
+          </a:xfrm>
+          <a:prstGeom prst="line">
+            <a:avLst/>
+          </a:prstGeom>
+          <a:ln w="7620">
+            <a:solidFill>
+              <a:srgbClr val="2E4756"/>
+            </a:solidFill>
+          </a:ln>
+          <a:effectLst/>
+        </p:spPr>
+      </p:cxnSp>
+      <p:sp>
+        <p:nvSpPr>
+          <p:cNvPr id="75" name="C1-E32 text 73" descr="sci-ppt:o073"/>
+          <p:cNvSpPr txBox="1"/>
+          <p:nvPr/>
+        </p:nvSpPr>
+        <p:spPr>
+          <a:xfrm>
+            <a:off x="8092440" y="1615875"/>
+            <a:ext cx="777240" cy="208407"/>
+          </a:xfrm>
+          <a:prstGeom prst="rect">
+            <a:avLst/>
+          </a:prstGeom>
+          <a:noFill/>
+          <a:effectLst/>
+        </p:spPr>
+        <p:txBody>
+          <a:bodyPr wrap="none" lIns="18288" rIns="18288" tIns="18288" bIns="18288" anchor="t">
+            <a:spAutoFit/>
+          </a:bodyPr>
+          <a:lstStyle/>
+          <a:p>
+            <a:pPr algn="r">
+              <a:spcAft>
+                <a:spcPts val="0"/>
+              </a:spcAft>
+            </a:pPr>
+            <a:r>
+              <a:rPr sz="1050" b="0" i="0">
+                <a:solidFill>
+                  <a:srgbClr val="B4C7D2"/>
+                </a:solidFill>
+                <a:latin typeface="Arial"/>
+              </a:rPr>
+              <a:t>1</a:t>
+            </a:r>
+          </a:p>
+        </p:txBody>
+      </p:sp>
+      <p:sp>
+        <p:nvSpPr>
+          <p:cNvPr id="76" name="C1-E32 text 74" descr="sci-ppt:o074"/>
+          <p:cNvSpPr txBox="1"/>
+          <p:nvPr/>
+        </p:nvSpPr>
+        <p:spPr>
+          <a:xfrm>
+            <a:off x="8961120" y="4855464"/>
+            <a:ext cx="2834640" cy="231648"/>
+          </a:xfrm>
+          <a:prstGeom prst="rect">
+            <a:avLst/>
+          </a:prstGeom>
+          <a:noFill/>
+          <a:effectLst/>
+        </p:spPr>
+        <p:txBody>
+          <a:bodyPr wrap="none" lIns="18288" rIns="18288" tIns="18288" bIns="18288" anchor="t">
+            <a:spAutoFit/>
+          </a:bodyPr>
+          <a:lstStyle/>
+          <a:p>
+            <a:pPr algn="ctr">
+              <a:spcAft>
+                <a:spcPts val="0"/>
+              </a:spcAft>
+            </a:pPr>
+            <a:r>
+              <a:rPr sz="1200" b="0" i="0">
+                <a:solidFill>
+                  <a:srgbClr val="E7F0F3"/>
+                </a:solidFill>
+                <a:latin typeface="Arial"/>
+              </a:rPr>
+              <a:t>R / Rₘₐₓ</a:t>
+            </a:r>
+          </a:p>
+        </p:txBody>
+      </p:sp>
+      <p:sp>
+        <p:nvSpPr>
+          <p:cNvPr id="77" name="C1-E32 text 75" descr="sci-ppt:o075"/>
+          <p:cNvSpPr txBox="1"/>
+          <p:nvPr/>
+        </p:nvSpPr>
+        <p:spPr>
+          <a:xfrm>
+            <a:off x="8412480" y="1207007"/>
+            <a:ext cx="2834640" cy="231648"/>
+          </a:xfrm>
+          <a:prstGeom prst="rect">
+            <a:avLst/>
+          </a:prstGeom>
+          <a:noFill/>
+          <a:effectLst/>
+        </p:spPr>
+        <p:txBody>
+          <a:bodyPr wrap="none" lIns="18288" rIns="18288" tIns="18288" bIns="18288" anchor="t">
+            <a:spAutoFit/>
+          </a:bodyPr>
+          <a:lstStyle/>
+          <a:p>
+            <a:pPr algn="l">
+              <a:spcAft>
+                <a:spcPts val="0"/>
+              </a:spcAft>
+            </a:pPr>
+            <a:r>
+              <a:rPr sz="1200" b="0" i="0">
+                <a:solidFill>
+                  <a:srgbClr val="E7F0F3"/>
+                </a:solidFill>
+                <a:latin typeface="Arial"/>
+              </a:rPr>
+              <a:t>Kₗ / E_B</a:t>
+            </a:r>
+          </a:p>
+        </p:txBody>
+      </p:sp>
+      <p:sp>
+        <p:nvSpPr>
+          <p:cNvPr id="78" name="C1-E32 polygon 76" descr="sci-ppt:o076"/>
+          <p:cNvSpPr/>
+          <p:nvPr/>
+        </p:nvSpPr>
+        <p:spPr>
+          <a:xfrm>
+            <a:off x="8961120" y="1698171"/>
+            <a:ext cx="2834640" cy="2873829"/>
+          </a:xfrm>
+          <a:custGeom>
+            <a:avLst/>
+            <a:gdLst/>
+            <a:ahLst/>
+            <a:cxnLst/>
+            <a:rect l="l" t="t" r="r" b="b"/>
+            <a:pathLst>
+              <a:path w="2834640" h="2873829">
+                <a:moveTo>
+                  <a:pt x="0" y="0"/>
+                </a:moveTo>
+                <a:lnTo>
+                  <a:pt x="28632" y="3"/>
+                </a:lnTo>
+                <a:lnTo>
+                  <a:pt x="57265" y="24"/>
+                </a:lnTo>
+                <a:lnTo>
+                  <a:pt x="85898" y="80"/>
+                </a:lnTo>
+                <a:lnTo>
+                  <a:pt x="114530" y="189"/>
+                </a:lnTo>
+                <a:lnTo>
+                  <a:pt x="143163" y="370"/>
+                </a:lnTo>
+                <a:lnTo>
+                  <a:pt x="171796" y="640"/>
+                </a:lnTo>
+                <a:lnTo>
+                  <a:pt x="200429" y="1016"/>
+                </a:lnTo>
+                <a:lnTo>
+                  <a:pt x="229061" y="1516"/>
+                </a:lnTo>
+                <a:lnTo>
+                  <a:pt x="257694" y="2159"/>
+                </a:lnTo>
+                <a:lnTo>
+                  <a:pt x="286327" y="2962"/>
+                </a:lnTo>
+                <a:lnTo>
+                  <a:pt x="314960" y="3942"/>
+                </a:lnTo>
+                <a:lnTo>
+                  <a:pt x="343592" y="5118"/>
+                </a:lnTo>
+                <a:lnTo>
+                  <a:pt x="372225" y="6507"/>
+                </a:lnTo>
+                <a:lnTo>
+                  <a:pt x="400858" y="8127"/>
+                </a:lnTo>
+                <a:lnTo>
+                  <a:pt x="429490" y="9996"/>
+                </a:lnTo>
+                <a:lnTo>
+                  <a:pt x="458123" y="12131"/>
+                </a:lnTo>
+                <a:lnTo>
+                  <a:pt x="486756" y="14551"/>
+                </a:lnTo>
+                <a:lnTo>
+                  <a:pt x="515389" y="17273"/>
+                </a:lnTo>
+                <a:lnTo>
+                  <a:pt x="544021" y="20315"/>
+                </a:lnTo>
+                <a:lnTo>
+                  <a:pt x="572654" y="23694"/>
+                </a:lnTo>
+                <a:lnTo>
+                  <a:pt x="601287" y="27429"/>
+                </a:lnTo>
+                <a:lnTo>
+                  <a:pt x="629920" y="31537"/>
+                </a:lnTo>
+                <a:lnTo>
+                  <a:pt x="658552" y="36036"/>
+                </a:lnTo>
+                <a:lnTo>
+                  <a:pt x="687185" y="40944"/>
+                </a:lnTo>
+                <a:lnTo>
+                  <a:pt x="715818" y="46278"/>
+                </a:lnTo>
+                <a:lnTo>
+                  <a:pt x="744450" y="52056"/>
+                </a:lnTo>
+                <a:lnTo>
+                  <a:pt x="773083" y="58297"/>
+                </a:lnTo>
+                <a:lnTo>
+                  <a:pt x="801716" y="65017"/>
+                </a:lnTo>
+                <a:lnTo>
+                  <a:pt x="830349" y="72235"/>
+                </a:lnTo>
+                <a:lnTo>
+                  <a:pt x="858981" y="79968"/>
+                </a:lnTo>
+                <a:lnTo>
+                  <a:pt x="887614" y="88235"/>
+                </a:lnTo>
+                <a:lnTo>
+                  <a:pt x="916247" y="97052"/>
+                </a:lnTo>
+                <a:lnTo>
+                  <a:pt x="944880" y="106438"/>
+                </a:lnTo>
+                <a:lnTo>
+                  <a:pt x="973512" y="116410"/>
+                </a:lnTo>
+                <a:lnTo>
+                  <a:pt x="1002145" y="126987"/>
+                </a:lnTo>
+                <a:lnTo>
+                  <a:pt x="1030778" y="138186"/>
+                </a:lnTo>
+                <a:lnTo>
+                  <a:pt x="1059410" y="150024"/>
+                </a:lnTo>
+                <a:lnTo>
+                  <a:pt x="1088043" y="162520"/>
+                </a:lnTo>
+                <a:lnTo>
+                  <a:pt x="1116676" y="175691"/>
+                </a:lnTo>
+                <a:lnTo>
+                  <a:pt x="1145309" y="189555"/>
+                </a:lnTo>
+                <a:lnTo>
+                  <a:pt x="1173941" y="204130"/>
+                </a:lnTo>
+                <a:lnTo>
+                  <a:pt x="1202574" y="219434"/>
+                </a:lnTo>
+                <a:lnTo>
+                  <a:pt x="1231207" y="235484"/>
+                </a:lnTo>
+                <a:lnTo>
+                  <a:pt x="1259840" y="252298"/>
+                </a:lnTo>
+                <a:lnTo>
+                  <a:pt x="1288472" y="269894"/>
+                </a:lnTo>
+                <a:lnTo>
+                  <a:pt x="1317105" y="288289"/>
+                </a:lnTo>
+                <a:lnTo>
+                  <a:pt x="1345738" y="307503"/>
+                </a:lnTo>
+                <a:lnTo>
+                  <a:pt x="1374370" y="327551"/>
+                </a:lnTo>
+                <a:lnTo>
+                  <a:pt x="1403003" y="348452"/>
+                </a:lnTo>
+                <a:lnTo>
+                  <a:pt x="1431636" y="370225"/>
+                </a:lnTo>
+                <a:lnTo>
+                  <a:pt x="1460269" y="392885"/>
+                </a:lnTo>
+                <a:lnTo>
+                  <a:pt x="1488901" y="416452"/>
+                </a:lnTo>
+                <a:lnTo>
+                  <a:pt x="1517534" y="440943"/>
+                </a:lnTo>
+                <a:lnTo>
+                  <a:pt x="1546167" y="466376"/>
+                </a:lnTo>
+                <a:lnTo>
+                  <a:pt x="1574800" y="492769"/>
+                </a:lnTo>
+                <a:lnTo>
+                  <a:pt x="1603432" y="520139"/>
+                </a:lnTo>
+                <a:lnTo>
+                  <a:pt x="1632065" y="548504"/>
+                </a:lnTo>
+                <a:lnTo>
+                  <a:pt x="1660698" y="577882"/>
+                </a:lnTo>
+                <a:lnTo>
+                  <a:pt x="1689330" y="608291"/>
+                </a:lnTo>
+                <a:lnTo>
+                  <a:pt x="1717963" y="639748"/>
+                </a:lnTo>
+                <a:lnTo>
+                  <a:pt x="1746596" y="672272"/>
+                </a:lnTo>
+                <a:lnTo>
+                  <a:pt x="1775229" y="705879"/>
+                </a:lnTo>
+                <a:lnTo>
+                  <a:pt x="1803861" y="740588"/>
+                </a:lnTo>
+                <a:lnTo>
+                  <a:pt x="1832494" y="776417"/>
+                </a:lnTo>
+                <a:lnTo>
+                  <a:pt x="1861127" y="813383"/>
+                </a:lnTo>
+                <a:lnTo>
+                  <a:pt x="1889760" y="851505"/>
+                </a:lnTo>
+                <a:lnTo>
+                  <a:pt x="1918392" y="890799"/>
+                </a:lnTo>
+                <a:lnTo>
+                  <a:pt x="1947025" y="931284"/>
+                </a:lnTo>
+                <a:lnTo>
+                  <a:pt x="1975658" y="972977"/>
+                </a:lnTo>
+                <a:lnTo>
+                  <a:pt x="2004290" y="1015896"/>
+                </a:lnTo>
+                <a:lnTo>
+                  <a:pt x="2032923" y="1060060"/>
+                </a:lnTo>
+                <a:lnTo>
+                  <a:pt x="2061556" y="1105485"/>
+                </a:lnTo>
+                <a:lnTo>
+                  <a:pt x="2090189" y="1152189"/>
+                </a:lnTo>
+                <a:lnTo>
+                  <a:pt x="2118821" y="1200191"/>
+                </a:lnTo>
+                <a:lnTo>
+                  <a:pt x="2147454" y="1249508"/>
+                </a:lnTo>
+                <a:lnTo>
+                  <a:pt x="2176087" y="1300158"/>
+                </a:lnTo>
+                <a:lnTo>
+                  <a:pt x="2204720" y="1352158"/>
+                </a:lnTo>
+                <a:lnTo>
+                  <a:pt x="2233352" y="1405527"/>
+                </a:lnTo>
+                <a:lnTo>
+                  <a:pt x="2261985" y="1460281"/>
+                </a:lnTo>
+                <a:lnTo>
+                  <a:pt x="2290618" y="1516440"/>
+                </a:lnTo>
+                <a:lnTo>
+                  <a:pt x="2319250" y="1574020"/>
+                </a:lnTo>
+                <a:lnTo>
+                  <a:pt x="2347883" y="1633040"/>
+                </a:lnTo>
+                <a:lnTo>
+                  <a:pt x="2376516" y="1693517"/>
+                </a:lnTo>
+                <a:lnTo>
+                  <a:pt x="2405149" y="1755469"/>
+                </a:lnTo>
+                <a:lnTo>
+                  <a:pt x="2433781" y="1818913"/>
+                </a:lnTo>
+                <a:lnTo>
+                  <a:pt x="2462414" y="1883869"/>
+                </a:lnTo>
+                <a:lnTo>
+                  <a:pt x="2491047" y="1950352"/>
+                </a:lnTo>
+                <a:lnTo>
+                  <a:pt x="2519680" y="2018382"/>
+                </a:lnTo>
+                <a:lnTo>
+                  <a:pt x="2548312" y="2087975"/>
+                </a:lnTo>
+                <a:lnTo>
+                  <a:pt x="2576945" y="2159150"/>
+                </a:lnTo>
+                <a:lnTo>
+                  <a:pt x="2605578" y="2231924"/>
+                </a:lnTo>
+                <a:lnTo>
+                  <a:pt x="2634210" y="2306316"/>
+                </a:lnTo>
+                <a:lnTo>
+                  <a:pt x="2662843" y="2382342"/>
+                </a:lnTo>
+                <a:lnTo>
+                  <a:pt x="2691476" y="2460021"/>
+                </a:lnTo>
+                <a:lnTo>
+                  <a:pt x="2720109" y="2539371"/>
+                </a:lnTo>
+                <a:lnTo>
+                  <a:pt x="2748741" y="2620408"/>
+                </a:lnTo>
+                <a:lnTo>
+                  <a:pt x="2777374" y="2703152"/>
+                </a:lnTo>
+                <a:lnTo>
+                  <a:pt x="2806007" y="2787619"/>
+                </a:lnTo>
+                <a:lnTo>
+                  <a:pt x="2834640" y="2873829"/>
+                </a:lnTo>
+              </a:path>
+            </a:pathLst>
+          </a:custGeom>
+          <a:noFill/>
+          <a:ln w="38100">
+            <a:solidFill>
+              <a:srgbClr val="7FC8F8"/>
+            </a:solidFill>
+          </a:ln>
+          <a:effectLst/>
+        </p:spPr>
+        <p:txBody>
+          <a:bodyPr rtlCol="0" anchor="ctr"/>
+          <a:lstStyle/>
+          <a:p>
+            <a:pPr algn="ctr"/>
+          </a:p>
+        </p:txBody>
+      </p:sp>
+      <p:sp>
+        <p:nvSpPr>
+          <p:cNvPr id="79" name="C1-E32 text 77" descr="sci-ppt:o077"/>
+          <p:cNvSpPr txBox="1"/>
+          <p:nvPr/>
+        </p:nvSpPr>
+        <p:spPr>
+          <a:xfrm>
+            <a:off x="822960" y="960120"/>
+            <a:ext cx="3200400" cy="270383"/>
+          </a:xfrm>
+          <a:prstGeom prst="rect">
+            <a:avLst/>
+          </a:prstGeom>
+          <a:noFill/>
+          <a:effectLst/>
+        </p:spPr>
+        <p:txBody>
+          <a:bodyPr wrap="none" lIns="18288" rIns="18288" tIns="18288" bIns="18288" anchor="t">
+            <a:spAutoFit/>
+          </a:bodyPr>
+          <a:lstStyle/>
+          <a:p>
+            <a:pPr algn="l">
+              <a:spcAft>
+                <a:spcPts val="0"/>
+              </a:spcAft>
+            </a:pPr>
+            <a:r>
+              <a:rPr sz="1450" b="1" i="0">
+                <a:solidFill>
+                  <a:srgbClr val="8EDBD4"/>
+                </a:solidFill>
+                <a:latin typeface="Arial"/>
+              </a:rPr>
+              <a:t>Speed</a:t>
+            </a:r>
+          </a:p>
+        </p:txBody>
+      </p:sp>
+      <p:sp>
+        <p:nvSpPr>
+          <p:cNvPr id="80" name="C1-E32 text 78" descr="sci-ppt:o078"/>
+          <p:cNvSpPr txBox="1"/>
+          <p:nvPr/>
+        </p:nvSpPr>
+        <p:spPr>
+          <a:xfrm>
+            <a:off x="822960" y="5257800"/>
+            <a:ext cx="3383280" cy="223900"/>
+          </a:xfrm>
+          <a:prstGeom prst="rect">
+            <a:avLst/>
+          </a:prstGeom>
+          <a:noFill/>
+          <a:effectLst/>
+        </p:spPr>
+        <p:txBody>
+          <a:bodyPr wrap="none" lIns="18288" rIns="18288" tIns="18288" bIns="18288" anchor="t">
+            <a:spAutoFit/>
+          </a:bodyPr>
+          <a:lstStyle/>
+          <a:p>
+            <a:pPr algn="l">
+              <a:spcAft>
+                <a:spcPts val="0"/>
+              </a:spcAft>
+            </a:pPr>
+            <a:r>
+              <a:rPr sz="1150" b="0" i="0">
+                <a:solidFill>
+                  <a:srgbClr val="E7F0F3"/>
+                </a:solidFill>
+                <a:latin typeface="Arial"/>
+              </a:rPr>
+              <a:t>Ṙ = −√{(2Δp_c/3ρ)[(Rₘₐₓ/R)³ − 1]}</a:t>
+            </a:r>
+          </a:p>
+        </p:txBody>
+      </p:sp>
+      <p:sp>
+        <p:nvSpPr>
+          <p:cNvPr id="81" name="C1-E32 text 79" descr="sci-ppt:o079"/>
+          <p:cNvSpPr txBox="1"/>
+          <p:nvPr/>
+        </p:nvSpPr>
+        <p:spPr>
+          <a:xfrm>
+            <a:off x="4937760" y="960120"/>
+            <a:ext cx="3200400" cy="270383"/>
+          </a:xfrm>
+          <a:prstGeom prst="rect">
+            <a:avLst/>
+          </a:prstGeom>
+          <a:noFill/>
+          <a:effectLst/>
+        </p:spPr>
+        <p:txBody>
+          <a:bodyPr wrap="none" lIns="18288" rIns="18288" tIns="18288" bIns="18288" anchor="t">
+            <a:spAutoFit/>
+          </a:bodyPr>
+          <a:lstStyle/>
+          <a:p>
+            <a:pPr algn="l">
+              <a:spcAft>
+                <a:spcPts val="0"/>
+              </a:spcAft>
+            </a:pPr>
+            <a:r>
+              <a:rPr sz="1450" b="1" i="0">
                 <a:solidFill>
                   <a:srgbClr val="F2B880"/>
                 </a:solidFill>
                 <a:latin typeface="Arial"/>
               </a:rPr>
-              <a:t>Source pressure</a:t>
-            </a:r>
-          </a:p>
-        </p:txBody>
-      </p:sp>
-      <p:sp>
-        <p:nvSpPr>
-          <p:cNvPr id="5" name="C1-E32 text 3" descr="sci-ppt:o003"/>
+              <a:t>Time</a:t>
+            </a:r>
+          </a:p>
+        </p:txBody>
+      </p:sp>
+      <p:sp>
+        <p:nvSpPr>
+          <p:cNvPr id="82" name="C1-E32 text 80" descr="sci-ppt:o080"/>
           <p:cNvSpPr txBox="1"/>
           <p:nvPr/>
         </p:nvSpPr>
         <p:spPr>
           <a:xfrm>
-            <a:off x="530352" y="1608201"/>
-            <a:ext cx="2356866" cy="433070"/>
+            <a:off x="4937760" y="5257800"/>
+            <a:ext cx="3383280" cy="402081"/>
           </a:xfrm>
           <a:prstGeom prst="rect">
             <a:avLst/>
@@ -3231,105 +6800,49 @@
           </a:bodyPr>
           <a:lstStyle/>
           <a:p>
-            <a:pPr algn="ctr">
+            <a:pPr algn="l">
               <a:spcAft>
                 <a:spcPts val="0"/>
               </a:spcAft>
             </a:pPr>
             <a:r>
-              <a:rPr sz="1250" b="0" i="0">
+              <a:rPr sz="1150" b="0" i="0">
                 <a:solidFill>
                   <a:srgbClr val="E7F0F3"/>
                 </a:solidFill>
                 <a:latin typeface="Arial"/>
               </a:rPr>
-              <a:t>p_b from the contents (E08),</a:t>
-            </a:r>
-          </a:p>
-          <a:p>
-            <a:pPr algn="ctr">
+              <a:t>t_c = B(5/6,1/2)/√6 · Rₘₐₓ√(ρ/Δp_c) = 2.744</a:t>
+            </a:r>
+          </a:p>
+          <a:p>
+            <a:pPr algn="l">
               <a:spcAft>
                 <a:spcPts val="0"/>
               </a:spcAft>
             </a:pPr>
             <a:r>
-              <a:rPr sz="1250" b="0" i="0">
+              <a:rPr sz="1150" b="0" i="0">
                 <a:solidFill>
                   <a:srgbClr val="E7F0F3"/>
                 </a:solidFill>
                 <a:latin typeface="Arial"/>
               </a:rPr>
-              <a:t>not from R alone</a:t>
-            </a:r>
-          </a:p>
-        </p:txBody>
-      </p:sp>
-      <p:cxnSp>
-        <p:nvCxnSpPr>
-          <p:cNvPr id="6" name="C1-E32 arrow 4" descr="sci-ppt:o004"/>
-          <p:cNvCxnSpPr/>
-          <p:nvPr/>
-        </p:nvCxnSpPr>
-        <p:spPr>
-          <a:xfrm>
-            <a:off x="2987802" y="2057400"/>
-            <a:ext cx="356616" cy="0"/>
-          </a:xfrm>
-          <a:prstGeom prst="line">
-            <a:avLst/>
-          </a:prstGeom>
-          <a:ln w="27940">
-            <a:solidFill>
-              <a:srgbClr val="B4C7D2"/>
-            </a:solidFill>
-            <a:headEnd type="none" w="med" len="med"/>
-            <a:tailEnd type="triangle" w="med" len="med"/>
-          </a:ln>
-          <a:effectLst/>
-        </p:spPr>
-      </p:cxnSp>
-      <p:sp>
-        <p:nvSpPr>
-          <p:cNvPr id="7" name="C1-E32 round_rect 5" descr="sci-ppt:o005"/>
-          <p:cNvSpPr/>
-          <p:nvPr/>
-        </p:nvSpPr>
-        <p:spPr>
-          <a:xfrm>
-            <a:off x="3371850" y="1280160"/>
-            <a:ext cx="2503170" cy="1554480"/>
-          </a:xfrm>
-          <a:prstGeom prst="roundRect">
-            <a:avLst/>
-          </a:prstGeom>
-          <a:solidFill>
-            <a:srgbClr val="213E4B"/>
-          </a:solidFill>
-          <a:ln w="20320">
-            <a:solidFill>
-              <a:srgbClr val="8EDBD4"/>
-            </a:solidFill>
-          </a:ln>
-          <a:effectLst/>
-        </p:spPr>
-        <p:txBody>
-          <a:bodyPr rtlCol="0" anchor="ctr"/>
-          <a:lstStyle/>
-          <a:p>
-            <a:pPr algn="ctr"/>
-          </a:p>
-        </p:txBody>
-      </p:sp>
-      <p:sp>
-        <p:nvSpPr>
-          <p:cNvPr id="8" name="C1-E32 text 6" descr="sci-ppt:o006"/>
+              <a:t>µs</a:t>
+            </a:r>
+          </a:p>
+        </p:txBody>
+      </p:sp>
+      <p:sp>
+        <p:nvSpPr>
+          <p:cNvPr id="83" name="C1-E32 text 81" descr="sci-ppt:o081"/>
           <p:cNvSpPr txBox="1"/>
           <p:nvPr/>
         </p:nvSpPr>
         <p:spPr>
           <a:xfrm>
-            <a:off x="3445002" y="1335024"/>
-            <a:ext cx="2356866" cy="254889"/>
+            <a:off x="8961120" y="960120"/>
+            <a:ext cx="3200400" cy="270383"/>
           </a:xfrm>
           <a:prstGeom prst="rect">
             <a:avLst/>
@@ -3343,33 +6856,33 @@
           </a:bodyPr>
           <a:lstStyle/>
           <a:p>
-            <a:pPr algn="ctr">
+            <a:pPr algn="l">
               <a:spcAft>
                 <a:spcPts val="0"/>
               </a:spcAft>
             </a:pPr>
             <a:r>
-              <a:rPr sz="1350" b="1" i="0">
+              <a:rPr sz="1450" b="1" i="0">
                 <a:solidFill>
-                  <a:srgbClr val="8EDBD4"/>
+                  <a:srgbClr val="7FC8F8"/>
                 </a:solidFill>
                 <a:latin typeface="Arial"/>
               </a:rPr>
-              <a:t>Radius motion</a:t>
-            </a:r>
-          </a:p>
-        </p:txBody>
-      </p:sp>
-      <p:sp>
-        <p:nvSpPr>
-          <p:cNvPr id="9" name="C1-E32 text 7" descr="sci-ppt:o007"/>
+              <a:t>Energy</a:t>
+            </a:r>
+          </a:p>
+        </p:txBody>
+      </p:sp>
+      <p:sp>
+        <p:nvSpPr>
+          <p:cNvPr id="84" name="C1-E32 text 82" descr="sci-ppt:o082"/>
           <p:cNvSpPr txBox="1"/>
           <p:nvPr/>
         </p:nvSpPr>
         <p:spPr>
           <a:xfrm>
-            <a:off x="3445002" y="1608201"/>
-            <a:ext cx="2356866" cy="433070"/>
+            <a:off x="8961120" y="5257800"/>
+            <a:ext cx="3383280" cy="223900"/>
           </a:xfrm>
           <a:prstGeom prst="rect">
             <a:avLst/>
@@ -3383,401 +6896,33 @@
           </a:bodyPr>
           <a:lstStyle/>
           <a:p>
-            <a:pPr algn="ctr">
+            <a:pPr algn="l">
               <a:spcAft>
                 <a:spcPts val="0"/>
               </a:spcAft>
             </a:pPr>
             <a:r>
-              <a:rPr sz="1250" b="0" i="0">
+              <a:rPr sz="1150" b="0" i="0">
                 <a:solidFill>
                   <a:srgbClr val="E7F0F3"/>
                 </a:solidFill>
                 <a:latin typeface="Arial"/>
               </a:rPr>
-              <a:t>Rayleigh–Plesset: p_b − p∞ −</a:t>
-            </a:r>
-          </a:p>
-          <a:p>
-            <a:pPr algn="ctr">
-              <a:spcAft>
-                <a:spcPts val="0"/>
-              </a:spcAft>
-            </a:pPr>
-            <a:r>
-              <a:rPr sz="1250" b="0" i="0">
-                <a:solidFill>
-                  <a:srgbClr val="E7F0F3"/>
-                </a:solidFill>
-                <a:latin typeface="Arial"/>
-              </a:rPr>
-              <a:t>2σ/R − 4μṘ/R (E07)</a:t>
-            </a:r>
-          </a:p>
-        </p:txBody>
-      </p:sp>
-      <p:cxnSp>
-        <p:nvCxnSpPr>
-          <p:cNvPr id="10" name="C1-E32 arrow 8" descr="sci-ppt:o008"/>
-          <p:cNvCxnSpPr/>
-          <p:nvPr/>
-        </p:nvCxnSpPr>
-        <p:spPr>
-          <a:xfrm>
-            <a:off x="5902452" y="2057400"/>
-            <a:ext cx="356616" cy="0"/>
-          </a:xfrm>
-          <a:prstGeom prst="line">
-            <a:avLst/>
-          </a:prstGeom>
-          <a:ln w="27940">
-            <a:solidFill>
-              <a:srgbClr val="B4C7D2"/>
-            </a:solidFill>
-            <a:headEnd type="none" w="med" len="med"/>
-            <a:tailEnd type="triangle" w="med" len="med"/>
-          </a:ln>
-          <a:effectLst/>
-        </p:spPr>
-      </p:cxnSp>
-      <p:sp>
-        <p:nvSpPr>
-          <p:cNvPr id="11" name="C1-E32 round_rect 9" descr="sci-ppt:o009"/>
-          <p:cNvSpPr/>
-          <p:nvPr/>
-        </p:nvSpPr>
-        <p:spPr>
-          <a:xfrm>
-            <a:off x="6286500" y="1280160"/>
-            <a:ext cx="2503170" cy="1554480"/>
-          </a:xfrm>
-          <a:prstGeom prst="roundRect">
-            <a:avLst/>
-          </a:prstGeom>
-          <a:solidFill>
-            <a:srgbClr val="213E4B"/>
-          </a:solidFill>
-          <a:ln w="20320">
-            <a:solidFill>
-              <a:srgbClr val="7FC8F8"/>
-            </a:solidFill>
-          </a:ln>
-          <a:effectLst/>
-        </p:spPr>
-        <p:txBody>
-          <a:bodyPr rtlCol="0" anchor="ctr"/>
-          <a:lstStyle/>
-          <a:p>
-            <a:pPr algn="ctr"/>
-          </a:p>
-        </p:txBody>
-      </p:sp>
-      <p:sp>
-        <p:nvSpPr>
-          <p:cNvPr id="12" name="C1-E32 text 10" descr="sci-ppt:o010"/>
+              <a:t>Kₗ = (4π/3)Δp_c(Rₘₐₓ³ − R³)</a:t>
+            </a:r>
+          </a:p>
+        </p:txBody>
+      </p:sp>
+      <p:sp>
+        <p:nvSpPr>
+          <p:cNvPr id="85" name="C1-E32 text 83" descr="sci-ppt:o083"/>
           <p:cNvSpPr txBox="1"/>
           <p:nvPr/>
         </p:nvSpPr>
         <p:spPr>
           <a:xfrm>
-            <a:off x="6359652" y="1335024"/>
-            <a:ext cx="2356866" cy="254889"/>
-          </a:xfrm>
-          <a:prstGeom prst="rect">
-            <a:avLst/>
-          </a:prstGeom>
-          <a:noFill/>
-          <a:effectLst/>
-        </p:spPr>
-        <p:txBody>
-          <a:bodyPr wrap="none" lIns="18288" rIns="18288" tIns="18288" bIns="18288" anchor="t">
-            <a:spAutoFit/>
-          </a:bodyPr>
-          <a:lstStyle/>
-          <a:p>
-            <a:pPr algn="ctr">
-              <a:spcAft>
-                <a:spcPts val="0"/>
-              </a:spcAft>
-            </a:pPr>
-            <a:r>
-              <a:rPr sz="1350" b="1" i="0">
-                <a:solidFill>
-                  <a:srgbClr val="7FC8F8"/>
-                </a:solidFill>
-                <a:latin typeface="Arial"/>
-              </a:rPr>
-              <a:t>Liquid response</a:t>
-            </a:r>
-          </a:p>
-        </p:txBody>
-      </p:sp>
-      <p:sp>
-        <p:nvSpPr>
-          <p:cNvPr id="13" name="C1-E32 text 11" descr="sci-ppt:o011"/>
-          <p:cNvSpPr txBox="1"/>
-          <p:nvPr/>
-        </p:nvSpPr>
-        <p:spPr>
-          <a:xfrm>
-            <a:off x="6359652" y="1608201"/>
-            <a:ext cx="2356866" cy="626745"/>
-          </a:xfrm>
-          <a:prstGeom prst="rect">
-            <a:avLst/>
-          </a:prstGeom>
-          <a:noFill/>
-          <a:effectLst/>
-        </p:spPr>
-        <p:txBody>
-          <a:bodyPr wrap="none" lIns="18288" rIns="18288" tIns="18288" bIns="18288" anchor="t">
-            <a:spAutoFit/>
-          </a:bodyPr>
-          <a:lstStyle/>
-          <a:p>
-            <a:pPr algn="ctr">
-              <a:spcAft>
-                <a:spcPts val="0"/>
-              </a:spcAft>
-            </a:pPr>
-            <a:r>
-              <a:rPr sz="1250" b="0" i="0">
-                <a:solidFill>
-                  <a:srgbClr val="E7F0F3"/>
-                </a:solidFill>
-                <a:latin typeface="Arial"/>
-              </a:rPr>
-              <a:t>inertia stores the work;</a:t>
-            </a:r>
-          </a:p>
-          <a:p>
-            <a:pPr algn="ctr">
-              <a:spcAft>
-                <a:spcPts val="0"/>
-              </a:spcAft>
-            </a:pPr>
-            <a:r>
-              <a:rPr sz="1250" b="0" i="0">
-                <a:solidFill>
-                  <a:srgbClr val="E7F0F3"/>
-                </a:solidFill>
-                <a:latin typeface="Arial"/>
-              </a:rPr>
-              <a:t>impulse Π gives early speed</a:t>
-            </a:r>
-          </a:p>
-          <a:p>
-            <a:pPr algn="ctr">
-              <a:spcAft>
-                <a:spcPts val="0"/>
-              </a:spcAft>
-            </a:pPr>
-            <a:r>
-              <a:rPr sz="1250" b="0" i="0">
-                <a:solidFill>
-                  <a:srgbClr val="E7F0F3"/>
-                </a:solidFill>
-                <a:latin typeface="Arial"/>
-              </a:rPr>
-              <a:t>(E05, E21)</a:t>
-            </a:r>
-          </a:p>
-        </p:txBody>
-      </p:sp>
-      <p:cxnSp>
-        <p:nvCxnSpPr>
-          <p:cNvPr id="14" name="C1-E32 arrow 12" descr="sci-ppt:o012"/>
-          <p:cNvCxnSpPr/>
-          <p:nvPr/>
-        </p:nvCxnSpPr>
-        <p:spPr>
-          <a:xfrm>
-            <a:off x="8817102" y="2057400"/>
-            <a:ext cx="356616" cy="0"/>
-          </a:xfrm>
-          <a:prstGeom prst="line">
-            <a:avLst/>
-          </a:prstGeom>
-          <a:ln w="27940">
-            <a:solidFill>
-              <a:srgbClr val="B4C7D2"/>
-            </a:solidFill>
-            <a:headEnd type="none" w="med" len="med"/>
-            <a:tailEnd type="triangle" w="med" len="med"/>
-          </a:ln>
-          <a:effectLst/>
-        </p:spPr>
-      </p:cxnSp>
-      <p:sp>
-        <p:nvSpPr>
-          <p:cNvPr id="15" name="C1-E32 round_rect 13" descr="sci-ppt:o013"/>
-          <p:cNvSpPr/>
-          <p:nvPr/>
-        </p:nvSpPr>
-        <p:spPr>
-          <a:xfrm>
-            <a:off x="9201150" y="1280160"/>
-            <a:ext cx="2503170" cy="1554480"/>
-          </a:xfrm>
-          <a:prstGeom prst="roundRect">
-            <a:avLst/>
-          </a:prstGeom>
-          <a:solidFill>
-            <a:srgbClr val="213E4B"/>
-          </a:solidFill>
-          <a:ln w="20320">
-            <a:solidFill>
-              <a:srgbClr val="F28BA0"/>
-            </a:solidFill>
-          </a:ln>
-          <a:effectLst/>
-        </p:spPr>
-        <p:txBody>
-          <a:bodyPr rtlCol="0" anchor="ctr"/>
-          <a:lstStyle/>
-          <a:p>
-            <a:pPr algn="ctr"/>
-          </a:p>
-        </p:txBody>
-      </p:sp>
-      <p:sp>
-        <p:nvSpPr>
-          <p:cNvPr id="16" name="C1-E32 text 14" descr="sci-ppt:o014"/>
-          <p:cNvSpPr txBox="1"/>
-          <p:nvPr/>
-        </p:nvSpPr>
-        <p:spPr>
-          <a:xfrm>
-            <a:off x="9274302" y="1335024"/>
-            <a:ext cx="2356866" cy="254889"/>
-          </a:xfrm>
-          <a:prstGeom prst="rect">
-            <a:avLst/>
-          </a:prstGeom>
-          <a:noFill/>
-          <a:effectLst/>
-        </p:spPr>
-        <p:txBody>
-          <a:bodyPr wrap="none" lIns="18288" rIns="18288" tIns="18288" bIns="18288" anchor="t">
-            <a:spAutoFit/>
-          </a:bodyPr>
-          <a:lstStyle/>
-          <a:p>
-            <a:pPr algn="ctr">
-              <a:spcAft>
-                <a:spcPts val="0"/>
-              </a:spcAft>
-            </a:pPr>
-            <a:r>
-              <a:rPr sz="1350" b="1" i="0">
-                <a:solidFill>
-                  <a:srgbClr val="F28BA0"/>
-                </a:solidFill>
-                <a:latin typeface="Arial"/>
-              </a:rPr>
-              <a:t>Geometry</a:t>
-            </a:r>
-          </a:p>
-        </p:txBody>
-      </p:sp>
-      <p:sp>
-        <p:nvSpPr>
-          <p:cNvPr id="17" name="C1-E32 text 15" descr="sci-ppt:o015"/>
-          <p:cNvSpPr txBox="1"/>
-          <p:nvPr/>
-        </p:nvSpPr>
-        <p:spPr>
-          <a:xfrm>
-            <a:off x="9274302" y="1608201"/>
-            <a:ext cx="2356866" cy="433070"/>
-          </a:xfrm>
-          <a:prstGeom prst="rect">
-            <a:avLst/>
-          </a:prstGeom>
-          <a:noFill/>
-          <a:effectLst/>
-        </p:spPr>
-        <p:txBody>
-          <a:bodyPr wrap="none" lIns="18288" rIns="18288" tIns="18288" bIns="18288" anchor="t">
-            <a:spAutoFit/>
-          </a:bodyPr>
-          <a:lstStyle/>
-          <a:p>
-            <a:pPr algn="ctr">
-              <a:spcAft>
-                <a:spcPts val="0"/>
-              </a:spcAft>
-            </a:pPr>
-            <a:r>
-              <a:rPr sz="1250" b="0" i="0">
-                <a:solidFill>
-                  <a:srgbClr val="E7F0F3"/>
-                </a:solidFill>
-                <a:latin typeface="Arial"/>
-              </a:rPr>
-              <a:t>stand-off and walls decide</a:t>
-            </a:r>
-          </a:p>
-          <a:p>
-            <a:pPr algn="ctr">
-              <a:spcAft>
-                <a:spcPts val="0"/>
-              </a:spcAft>
-            </a:pPr>
-            <a:r>
-              <a:rPr sz="1250" b="0" i="0">
-                <a:solidFill>
-                  <a:srgbClr val="E7F0F3"/>
-                </a:solidFill>
-                <a:latin typeface="Arial"/>
-              </a:rPr>
-              <a:t>direction (E26–E29)</a:t>
-            </a:r>
-          </a:p>
-        </p:txBody>
-      </p:sp>
-      <p:sp>
-        <p:nvSpPr>
-          <p:cNvPr id="18" name="C1-E32 round_rect 16" descr="sci-ppt:o016"/>
-          <p:cNvSpPr/>
-          <p:nvPr/>
-        </p:nvSpPr>
-        <p:spPr>
-          <a:xfrm>
-            <a:off x="457200" y="3200400"/>
-            <a:ext cx="11247120" cy="1417320"/>
-          </a:xfrm>
-          <a:prstGeom prst="roundRect">
-            <a:avLst/>
-          </a:prstGeom>
-          <a:solidFill>
-            <a:srgbClr val="213E4B"/>
-          </a:solidFill>
-          <a:ln w="20320">
-            <a:solidFill>
-              <a:srgbClr val="B4C7D2"/>
-            </a:solidFill>
-          </a:ln>
-          <a:effectLst/>
-        </p:spPr>
-        <p:txBody>
-          <a:bodyPr rtlCol="0" anchor="ctr"/>
-          <a:lstStyle/>
-          <a:p>
-            <a:pPr algn="ctr"/>
-          </a:p>
-        </p:txBody>
-      </p:sp>
-      <p:sp>
-        <p:nvSpPr>
-          <p:cNvPr id="19" name="C1-E32 text 17" descr="sci-ppt:o017"/>
-          <p:cNvSpPr txBox="1"/>
-          <p:nvPr/>
-        </p:nvSpPr>
-        <p:spPr>
-          <a:xfrm>
-            <a:off x="594360" y="3273552"/>
-            <a:ext cx="10972800" cy="254889"/>
+            <a:off x="457200" y="5897880"/>
+            <a:ext cx="11338560" cy="433070"/>
           </a:xfrm>
           <a:prstGeom prst="rect">
             <a:avLst/>
@@ -3797,39 +6942,15 @@
               </a:spcAft>
             </a:pPr>
             <a:r>
-              <a:rPr sz="1350" b="1" i="0">
+              <a:rPr sz="1250" b="0" i="0">
                 <a:solidFill>
-                  <a:srgbClr val="8EDBD4"/>
+                  <a:srgbClr val="F2B880"/>
                 </a:solidFill>
                 <a:latin typeface="Arial"/>
               </a:rPr>
-              <a:t>Reference formulas of the defence answer</a:t>
-            </a:r>
-          </a:p>
-        </p:txBody>
-      </p:sp>
-      <p:sp>
-        <p:nvSpPr>
-          <p:cNvPr id="20" name="C1-E32 text 18" descr="sci-ppt:o018"/>
-          <p:cNvSpPr txBox="1"/>
-          <p:nvPr/>
-        </p:nvSpPr>
-        <p:spPr>
-          <a:xfrm>
-            <a:off x="594360" y="3657600"/>
-            <a:ext cx="10972800" cy="479551"/>
-          </a:xfrm>
-          <a:prstGeom prst="rect">
-            <a:avLst/>
-          </a:prstGeom>
-          <a:noFill/>
-          <a:effectLst/>
-        </p:spPr>
-        <p:txBody>
-          <a:bodyPr wrap="none" lIns="18288" rIns="18288" tIns="18288" bIns="18288" anchor="t">
-            <a:spAutoFit/>
-          </a:bodyPr>
-          <a:lstStyle/>
+              <a:t>The singular speed belongs to an ideal radial trajectory (no gas, viscosity, tension or compressibility), not to a validated physical</a:t>
+            </a:r>
+          </a:p>
           <a:p>
             <a:pPr algn="l">
               <a:spcAft>
@@ -3837,132 +6958,20 @@
               </a:spcAft>
             </a:pPr>
             <a:r>
-              <a:rPr sz="1400" b="1" i="0">
-                <a:solidFill>
-                  <a:srgbClr val="E7F0F3"/>
-                </a:solidFill>
-                <a:latin typeface="Arial"/>
-              </a:rPr>
-              <a:t>ρ(RR̈ + 3Ṙ²/2) = p_b − p∞ − 2σ/R − 4μṘ/R</a:t>
-            </a:r>
-          </a:p>
-          <a:p>
-            <a:pPr algn="l">
-              <a:spcAft>
-                <a:spcPts val="0"/>
-              </a:spcAft>
-            </a:pPr>
-            <a:r>
-              <a:rPr sz="1400" b="1" i="0">
-                <a:solidFill>
-                  <a:srgbClr val="E7F0F3"/>
-                </a:solidFill>
-                <a:latin typeface="Arial"/>
-              </a:rPr>
-              <a:t>p_b = pᵥ,PFC + pᵥ,w + p_g</a:t>
-            </a:r>
-          </a:p>
-        </p:txBody>
-      </p:sp>
-      <p:sp>
-        <p:nvSpPr>
-          <p:cNvPr id="21" name="C1-E32 text 19" descr="sci-ppt:o019"/>
-          <p:cNvSpPr txBox="1"/>
-          <p:nvPr/>
-        </p:nvSpPr>
-        <p:spPr>
-          <a:xfrm>
-            <a:off x="457200" y="4846320"/>
-            <a:ext cx="11247120" cy="464057"/>
-          </a:xfrm>
-          <a:prstGeom prst="rect">
-            <a:avLst/>
-          </a:prstGeom>
-          <a:noFill/>
-          <a:effectLst/>
-        </p:spPr>
-        <p:txBody>
-          <a:bodyPr wrap="none" lIns="18288" rIns="18288" tIns="18288" bIns="18288" anchor="t">
-            <a:spAutoFit/>
-          </a:bodyPr>
-          <a:lstStyle/>
-          <a:p>
-            <a:pPr algn="l">
-              <a:spcAft>
-                <a:spcPts val="0"/>
-              </a:spcAft>
-            </a:pPr>
-            <a:r>
-              <a:rPr sz="1350" b="0" i="0">
+              <a:rPr sz="1250" b="0" i="0">
                 <a:solidFill>
                   <a:srgbClr val="F2B880"/>
                 </a:solidFill>
                 <a:latin typeface="Arial"/>
               </a:rPr>
-              <a:t>The source pressure moves carrier liquid. Whether that motion becomes a useful jet is decided by geometry, not by the</a:t>
-            </a:r>
-          </a:p>
-          <a:p>
-            <a:pPr algn="l">
-              <a:spcAft>
-                <a:spcPts val="0"/>
-              </a:spcAft>
-            </a:pPr>
-            <a:r>
-              <a:rPr sz="1350" b="0" i="0">
-                <a:solidFill>
-                  <a:srgbClr val="F2B880"/>
-                </a:solidFill>
-                <a:latin typeface="Arial"/>
-              </a:rPr>
-              <a:t>pressure alone.</a:t>
-            </a:r>
-          </a:p>
-        </p:txBody>
-      </p:sp>
-      <p:sp>
-        <p:nvSpPr>
-          <p:cNvPr id="22" name="C1-E32 text 20" descr="sci-ppt:o020"/>
-          <p:cNvSpPr txBox="1"/>
-          <p:nvPr/>
-        </p:nvSpPr>
-        <p:spPr>
-          <a:xfrm>
-            <a:off x="457200" y="5394960"/>
-            <a:ext cx="11247120" cy="239395"/>
-          </a:xfrm>
-          <a:prstGeom prst="rect">
-            <a:avLst/>
-          </a:prstGeom>
-          <a:noFill/>
-          <a:effectLst/>
-        </p:spPr>
-        <p:txBody>
-          <a:bodyPr wrap="none" lIns="18288" rIns="18288" tIns="18288" bIns="18288" anchor="t">
-            <a:spAutoFit/>
-          </a:bodyPr>
-          <a:lstStyle/>
-          <a:p>
-            <a:pPr algn="l">
-              <a:spcAft>
-                <a:spcPts val="0"/>
-              </a:spcAft>
-            </a:pPr>
-            <a:r>
-              <a:rPr sz="1250" b="0" i="0">
-                <a:solidFill>
-                  <a:srgbClr val="B4C7D2"/>
-                </a:solidFill>
-                <a:latin typeface="Arial"/>
-              </a:rPr>
-              <a:t>Every term of the radius equation is a pressure (Pa); every term of the composition is a partial pressure.</a:t>
-            </a:r>
-          </a:p>
-        </p:txBody>
-      </p:sp>
-      <p:sp>
-        <p:nvSpPr>
-          <p:cNvPr id="23" name="C1-E32 text 21" descr="sci-ppt:o021"/>
+              <a:t>maximum.</a:t>
+            </a:r>
+          </a:p>
+        </p:txBody>
+      </p:sp>
+      <p:sp>
+        <p:nvSpPr>
+          <p:cNvPr id="86" name="C1-E32 text 84" descr="sci-ppt:o084"/>
           <p:cNvSpPr txBox="1"/>
           <p:nvPr/>
         </p:nvSpPr>
@@ -3995,7 +7004,7 @@
                 </a:solidFill>
                 <a:latin typeface="Arial"/>
               </a:rPr>
-              <a:t>Summary of Eqs. C1-E07 and C1-E08.</a:t>
+              <a:t>Teaching inputs Rₘₐₓ = 30 µm, ρ = 1000 kg/m³, Δp_c = 100 kPa (Eqs. C1-E14, E16, E18).</a:t>
             </a:r>
           </a:p>
         </p:txBody>
